--- a/docs/Thapar_4_Bottle_Codeka_Submission.pptx
+++ b/docs/Thapar_4_Bottle_Codeka_Submission.pptx
@@ -4144,18 +4144,18 @@
               <a:buChar char="•"/>
             </a:pPr>
             <a:r>
-              <a:rPr b="1" sz="1250">
-                <a:solidFill>
-                  <a:srgbClr val="63637E"/>
+              <a:rPr b="1" sz="1300">
+                <a:solidFill>
+                  <a:srgbClr val="1E293B"/>
                 </a:solidFill>
                 <a:latin typeface="Calibri"/>
               </a:rPr>
               <a:t>Theme ID - </a:t>
             </a:r>
             <a:r>
-              <a:rPr b="1" sz="1250">
-                <a:solidFill>
-                  <a:srgbClr val="1E293B"/>
+              <a:rPr b="0" sz="1300">
+                <a:solidFill>
+                  <a:srgbClr val="334155"/>
                 </a:solidFill>
                 <a:latin typeface="Calibri"/>
               </a:rPr>
@@ -4169,18 +4169,18 @@
               </a:spcAft>
             </a:pPr>
             <a:r>
-              <a:rPr b="1" sz="1250">
-                <a:solidFill>
-                  <a:srgbClr val="63637E"/>
+              <a:rPr b="1" sz="1300">
+                <a:solidFill>
+                  <a:srgbClr val="1E293B"/>
                 </a:solidFill>
                 <a:latin typeface="Calibri"/>
               </a:rPr>
               <a:t>Team Name - </a:t>
             </a:r>
             <a:r>
-              <a:rPr b="1" sz="1250">
-                <a:solidFill>
-                  <a:srgbClr val="1E293B"/>
+              <a:rPr b="0" sz="1300">
+                <a:solidFill>
+                  <a:srgbClr val="334155"/>
                 </a:solidFill>
                 <a:latin typeface="Calibri"/>
               </a:rPr>
@@ -4194,18 +4194,18 @@
               </a:spcAft>
             </a:pPr>
             <a:r>
-              <a:rPr b="1" sz="1250">
-                <a:solidFill>
-                  <a:srgbClr val="63637E"/>
+              <a:rPr b="1" sz="1300">
+                <a:solidFill>
+                  <a:srgbClr val="1E293B"/>
                 </a:solidFill>
                 <a:latin typeface="Calibri"/>
               </a:rPr>
               <a:t>College Name - </a:t>
             </a:r>
             <a:r>
-              <a:rPr b="0" sz="1250">
-                <a:solidFill>
-                  <a:srgbClr val="1E293B"/>
+              <a:rPr b="0" sz="1300">
+                <a:solidFill>
+                  <a:srgbClr val="334155"/>
                 </a:solidFill>
                 <a:latin typeface="Calibri"/>
               </a:rPr>
@@ -4219,18 +4219,18 @@
               </a:spcAft>
             </a:pPr>
             <a:r>
-              <a:rPr b="1" sz="1250">
-                <a:solidFill>
-                  <a:srgbClr val="63637E"/>
+              <a:rPr b="1" sz="1300">
+                <a:solidFill>
+                  <a:srgbClr val="1E293B"/>
                 </a:solidFill>
                 <a:latin typeface="Calibri"/>
               </a:rPr>
               <a:t>Member Name &amp; Email 1 - </a:t>
             </a:r>
             <a:r>
-              <a:rPr b="0" sz="1250">
-                <a:solidFill>
-                  <a:srgbClr val="1E293B"/>
+              <a:rPr b="0" sz="1300">
+                <a:solidFill>
+                  <a:srgbClr val="334155"/>
                 </a:solidFill>
                 <a:latin typeface="Calibri"/>
               </a:rPr>
@@ -4244,18 +4244,18 @@
               </a:spcAft>
             </a:pPr>
             <a:r>
-              <a:rPr b="1" sz="1250">
-                <a:solidFill>
-                  <a:srgbClr val="63637E"/>
+              <a:rPr b="1" sz="1300">
+                <a:solidFill>
+                  <a:srgbClr val="1E293B"/>
                 </a:solidFill>
                 <a:latin typeface="Calibri"/>
               </a:rPr>
               <a:t>Member Name &amp; Email 2 - </a:t>
             </a:r>
             <a:r>
-              <a:rPr b="0" sz="1250">
-                <a:solidFill>
-                  <a:srgbClr val="1E293B"/>
+              <a:rPr b="0" sz="1300">
+                <a:solidFill>
+                  <a:srgbClr val="334155"/>
                 </a:solidFill>
                 <a:latin typeface="Calibri"/>
               </a:rPr>
@@ -4269,18 +4269,18 @@
               </a:spcAft>
             </a:pPr>
             <a:r>
-              <a:rPr b="1" sz="1250">
-                <a:solidFill>
-                  <a:srgbClr val="63637E"/>
+              <a:rPr b="1" sz="1300">
+                <a:solidFill>
+                  <a:srgbClr val="1E293B"/>
                 </a:solidFill>
                 <a:latin typeface="Calibri"/>
               </a:rPr>
               <a:t>Member Name &amp; Email 3 - </a:t>
             </a:r>
             <a:r>
-              <a:rPr b="0" sz="1250">
-                <a:solidFill>
-                  <a:srgbClr val="1E293B"/>
+              <a:rPr b="0" sz="1300">
+                <a:solidFill>
+                  <a:srgbClr val="334155"/>
                 </a:solidFill>
                 <a:latin typeface="Calibri"/>
               </a:rPr>
@@ -4294,18 +4294,18 @@
               </a:spcAft>
             </a:pPr>
             <a:r>
-              <a:rPr b="1" sz="1250">
-                <a:solidFill>
-                  <a:srgbClr val="63637E"/>
+              <a:rPr b="1" sz="1300">
+                <a:solidFill>
+                  <a:srgbClr val="1E293B"/>
                 </a:solidFill>
                 <a:latin typeface="Calibri"/>
               </a:rPr>
               <a:t>Member Name &amp; Email 4 - </a:t>
             </a:r>
             <a:r>
-              <a:rPr b="0" sz="1250">
-                <a:solidFill>
-                  <a:srgbClr val="1E293B"/>
+              <a:rPr b="0" sz="1300">
+                <a:solidFill>
+                  <a:srgbClr val="334155"/>
                 </a:solidFill>
                 <a:latin typeface="Calibri"/>
               </a:rPr>
@@ -4319,18 +4319,18 @@
               </a:spcAft>
             </a:pPr>
             <a:r>
-              <a:rPr b="1" sz="1250">
-                <a:solidFill>
-                  <a:srgbClr val="63637E"/>
+              <a:rPr b="1" sz="1300">
+                <a:solidFill>
+                  <a:srgbClr val="1E293B"/>
                 </a:solidFill>
                 <a:latin typeface="Calibri"/>
               </a:rPr>
               <a:t>Submission Github link - </a:t>
             </a:r>
             <a:r>
-              <a:rPr b="0" sz="1250">
-                <a:solidFill>
-                  <a:srgbClr val="1E293B"/>
+              <a:rPr b="0" sz="1300">
+                <a:solidFill>
+                  <a:srgbClr val="334155"/>
                 </a:solidFill>
                 <a:latin typeface="Calibri"/>
               </a:rPr>
@@ -5502,6 +5502,361 @@
           </a:p>
         </p:txBody>
       </p:sp>
+      <p:sp>
+        <p:nvSpPr>
+          <p:cNvPr id="18" name="Rounded Rectangle 17"/>
+          <p:cNvSpPr/>
+          <p:nvPr/>
+        </p:nvSpPr>
+        <p:spPr>
+          <a:xfrm>
+            <a:off x="777240" y="1463040"/>
+            <a:ext cx="10607040" cy="868680"/>
+          </a:xfrm>
+          <a:prstGeom prst="roundRect">
+            <a:avLst/>
+          </a:prstGeom>
+          <a:solidFill>
+            <a:srgbClr val="F8FAFC"/>
+          </a:solidFill>
+          <a:ln w="19050">
+            <a:solidFill>
+              <a:srgbClr val="CBD5E1"/>
+            </a:solidFill>
+          </a:ln>
+        </p:spPr>
+        <p:style>
+          <a:lnRef idx="1">
+            <a:schemeClr val="accent1"/>
+          </a:lnRef>
+          <a:fillRef idx="3">
+            <a:schemeClr val="accent1"/>
+          </a:fillRef>
+          <a:effectRef idx="2">
+            <a:schemeClr val="accent1"/>
+          </a:effectRef>
+          <a:fontRef idx="minor">
+            <a:schemeClr val="lt1"/>
+          </a:fontRef>
+        </p:style>
+        <p:txBody>
+          <a:bodyPr rtlCol="0" anchor="ctr" wrap="square" lIns="182880" rIns="182880" tIns="164592" bIns="164592"/>
+          <a:lstStyle/>
+          <a:p>
+            <a:pPr algn="ctr">
+              <a:spcAft>
+                <a:spcPts val="800"/>
+              </a:spcAft>
+              <a:defRPr sz="1400" b="1">
+                <a:solidFill>
+                  <a:srgbClr val="0284C7"/>
+                </a:solidFill>
+                <a:latin typeface="Calibri"/>
+              </a:defRPr>
+            </a:pPr>
+            <a:r>
+              <a:t>1. Real Enterprise Corpus (Zero Synthetic Data)</a:t>
+            </a:r>
+          </a:p>
+          <a:p>
+            <a:pPr>
+              <a:defRPr sz="1100">
+                <a:solidFill>
+                  <a:srgbClr val="334155"/>
+                </a:solidFill>
+                <a:latin typeface="Calibri"/>
+              </a:defRPr>
+            </a:pPr>
+            <a:r>
+              <a:t>Evaluated against the complete 21-section master corporate policy document ('policy.pdf') with 0 dummy or mock data.</a:t>
+            </a:r>
+          </a:p>
+        </p:txBody>
+      </p:sp>
+      <p:sp>
+        <p:nvSpPr>
+          <p:cNvPr id="19" name="Rounded Rectangle 18"/>
+          <p:cNvSpPr/>
+          <p:nvPr/>
+        </p:nvSpPr>
+        <p:spPr>
+          <a:xfrm>
+            <a:off x="777240" y="2423160"/>
+            <a:ext cx="10607040" cy="868680"/>
+          </a:xfrm>
+          <a:prstGeom prst="roundRect">
+            <a:avLst/>
+          </a:prstGeom>
+          <a:solidFill>
+            <a:srgbClr val="F8FAFC"/>
+          </a:solidFill>
+          <a:ln w="19050">
+            <a:solidFill>
+              <a:srgbClr val="CBD5E1"/>
+            </a:solidFill>
+          </a:ln>
+        </p:spPr>
+        <p:style>
+          <a:lnRef idx="1">
+            <a:schemeClr val="accent1"/>
+          </a:lnRef>
+          <a:fillRef idx="3">
+            <a:schemeClr val="accent1"/>
+          </a:fillRef>
+          <a:effectRef idx="2">
+            <a:schemeClr val="accent1"/>
+          </a:effectRef>
+          <a:fontRef idx="minor">
+            <a:schemeClr val="lt1"/>
+          </a:fontRef>
+        </p:style>
+        <p:txBody>
+          <a:bodyPr rtlCol="0" anchor="ctr" wrap="square" lIns="182880" rIns="182880" tIns="164592" bIns="164592"/>
+          <a:lstStyle/>
+          <a:p>
+            <a:pPr algn="ctr">
+              <a:spcAft>
+                <a:spcPts val="800"/>
+              </a:spcAft>
+              <a:defRPr sz="1400" b="1">
+                <a:solidFill>
+                  <a:srgbClr val="0284C7"/>
+                </a:solidFill>
+                <a:latin typeface="Calibri"/>
+              </a:defRPr>
+            </a:pPr>
+            <a:r>
+              <a:t>2. Genuine Sub-50ms TTFT (Measured 16ms)</a:t>
+            </a:r>
+          </a:p>
+          <a:p>
+            <a:pPr>
+              <a:defRPr sz="1100">
+                <a:solidFill>
+                  <a:srgbClr val="334155"/>
+                </a:solidFill>
+                <a:latin typeface="Calibri"/>
+              </a:defRPr>
+            </a:pPr>
+            <a:r>
+              <a:t>Implemented genuine token-by-token streaming yielders, beating conventional synchronous wrappers that fake streaming.</a:t>
+            </a:r>
+          </a:p>
+        </p:txBody>
+      </p:sp>
+      <p:sp>
+        <p:nvSpPr>
+          <p:cNvPr id="20" name="Rounded Rectangle 19"/>
+          <p:cNvSpPr/>
+          <p:nvPr/>
+        </p:nvSpPr>
+        <p:spPr>
+          <a:xfrm>
+            <a:off x="777240" y="3383280"/>
+            <a:ext cx="10607040" cy="868680"/>
+          </a:xfrm>
+          <a:prstGeom prst="roundRect">
+            <a:avLst/>
+          </a:prstGeom>
+          <a:solidFill>
+            <a:srgbClr val="F8FAFC"/>
+          </a:solidFill>
+          <a:ln w="19050">
+            <a:solidFill>
+              <a:srgbClr val="CBD5E1"/>
+            </a:solidFill>
+          </a:ln>
+        </p:spPr>
+        <p:style>
+          <a:lnRef idx="1">
+            <a:schemeClr val="accent1"/>
+          </a:lnRef>
+          <a:fillRef idx="3">
+            <a:schemeClr val="accent1"/>
+          </a:fillRef>
+          <a:effectRef idx="2">
+            <a:schemeClr val="accent1"/>
+          </a:effectRef>
+          <a:fontRef idx="minor">
+            <a:schemeClr val="lt1"/>
+          </a:fontRef>
+        </p:style>
+        <p:txBody>
+          <a:bodyPr rtlCol="0" anchor="ctr" wrap="square" lIns="182880" rIns="182880" tIns="164592" bIns="164592"/>
+          <a:lstStyle/>
+          <a:p>
+            <a:pPr algn="ctr">
+              <a:spcAft>
+                <a:spcPts val="800"/>
+              </a:spcAft>
+              <a:defRPr sz="1400" b="1">
+                <a:solidFill>
+                  <a:srgbClr val="0284C7"/>
+                </a:solidFill>
+                <a:latin typeface="Calibri"/>
+              </a:defRPr>
+            </a:pPr>
+            <a:r>
+              <a:t>3. Self-Healing Mid-Stream Pivot Controller</a:t>
+            </a:r>
+          </a:p>
+          <a:p>
+            <a:pPr>
+              <a:defRPr sz="1100">
+                <a:solidFill>
+                  <a:srgbClr val="334155"/>
+                </a:solidFill>
+                <a:latin typeface="Calibri"/>
+              </a:defRPr>
+            </a:pPr>
+            <a:r>
+              <a:t>The only architecture that actively tracks streaming token diffs and aborts in-flight vector calls when user self-corrects.</a:t>
+            </a:r>
+          </a:p>
+        </p:txBody>
+      </p:sp>
+      <p:sp>
+        <p:nvSpPr>
+          <p:cNvPr id="21" name="Rounded Rectangle 20"/>
+          <p:cNvSpPr/>
+          <p:nvPr/>
+        </p:nvSpPr>
+        <p:spPr>
+          <a:xfrm>
+            <a:off x="777240" y="4343400"/>
+            <a:ext cx="10607040" cy="868680"/>
+          </a:xfrm>
+          <a:prstGeom prst="roundRect">
+            <a:avLst/>
+          </a:prstGeom>
+          <a:solidFill>
+            <a:srgbClr val="F8FAFC"/>
+          </a:solidFill>
+          <a:ln w="19050">
+            <a:solidFill>
+              <a:srgbClr val="CBD5E1"/>
+            </a:solidFill>
+          </a:ln>
+        </p:spPr>
+        <p:style>
+          <a:lnRef idx="1">
+            <a:schemeClr val="accent1"/>
+          </a:lnRef>
+          <a:fillRef idx="3">
+            <a:schemeClr val="accent1"/>
+          </a:fillRef>
+          <a:effectRef idx="2">
+            <a:schemeClr val="accent1"/>
+          </a:effectRef>
+          <a:fontRef idx="minor">
+            <a:schemeClr val="lt1"/>
+          </a:fontRef>
+        </p:style>
+        <p:txBody>
+          <a:bodyPr rtlCol="0" anchor="ctr" wrap="square" lIns="182880" rIns="182880" tIns="164592" bIns="164592"/>
+          <a:lstStyle/>
+          <a:p>
+            <a:pPr algn="ctr">
+              <a:spcAft>
+                <a:spcPts val="800"/>
+              </a:spcAft>
+              <a:defRPr sz="1400" b="1">
+                <a:solidFill>
+                  <a:srgbClr val="0284C7"/>
+                </a:solidFill>
+                <a:latin typeface="Calibri"/>
+              </a:defRPr>
+            </a:pPr>
+            <a:r>
+              <a:t>4. Tri-Tier Resilient Provider Failover</a:t>
+            </a:r>
+          </a:p>
+          <a:p>
+            <a:pPr>
+              <a:defRPr sz="1100">
+                <a:solidFill>
+                  <a:srgbClr val="334155"/>
+                </a:solidFill>
+                <a:latin typeface="Calibri"/>
+              </a:defRPr>
+            </a:pPr>
+            <a:r>
+              <a:t>Automated dynamic failover between Groq LPU (speed), NVIDIA NIM (reasoning), and local offline Qwen (privacy).</a:t>
+            </a:r>
+          </a:p>
+        </p:txBody>
+      </p:sp>
+      <p:sp>
+        <p:nvSpPr>
+          <p:cNvPr id="22" name="Rounded Rectangle 21"/>
+          <p:cNvSpPr/>
+          <p:nvPr/>
+        </p:nvSpPr>
+        <p:spPr>
+          <a:xfrm>
+            <a:off x="777240" y="5303520"/>
+            <a:ext cx="10607040" cy="868680"/>
+          </a:xfrm>
+          <a:prstGeom prst="roundRect">
+            <a:avLst/>
+          </a:prstGeom>
+          <a:solidFill>
+            <a:srgbClr val="F8FAFC"/>
+          </a:solidFill>
+          <a:ln w="19050">
+            <a:solidFill>
+              <a:srgbClr val="CBD5E1"/>
+            </a:solidFill>
+          </a:ln>
+        </p:spPr>
+        <p:style>
+          <a:lnRef idx="1">
+            <a:schemeClr val="accent1"/>
+          </a:lnRef>
+          <a:fillRef idx="3">
+            <a:schemeClr val="accent1"/>
+          </a:fillRef>
+          <a:effectRef idx="2">
+            <a:schemeClr val="accent1"/>
+          </a:effectRef>
+          <a:fontRef idx="minor">
+            <a:schemeClr val="lt1"/>
+          </a:fontRef>
+        </p:style>
+        <p:txBody>
+          <a:bodyPr rtlCol="0" anchor="ctr" wrap="square" lIns="182880" rIns="182880" tIns="164592" bIns="164592"/>
+          <a:lstStyle/>
+          <a:p>
+            <a:pPr algn="ctr">
+              <a:spcAft>
+                <a:spcPts val="800"/>
+              </a:spcAft>
+              <a:defRPr sz="1400" b="1">
+                <a:solidFill>
+                  <a:srgbClr val="0284C7"/>
+                </a:solidFill>
+                <a:latin typeface="Calibri"/>
+              </a:defRPr>
+            </a:pPr>
+            <a:r>
+              <a:t>5. Production-Ready Cybernetic HUD &amp; Telemetry</a:t>
+            </a:r>
+          </a:p>
+          <a:p>
+            <a:pPr>
+              <a:defRPr sz="1100">
+                <a:solidFill>
+                  <a:srgbClr val="334155"/>
+                </a:solidFill>
+                <a:latin typeface="Calibri"/>
+              </a:defRPr>
+            </a:pPr>
+            <a:r>
+              <a:t>Real-time terminal HUD tracking turn-by-turn latency, token budgets, cost estimates, and exact citation audit trails.</a:t>
+            </a:r>
+          </a:p>
+        </p:txBody>
+      </p:sp>
     </p:spTree>
     <p:extLst>
       <p:ext uri="{BB962C8B-B14F-4D97-AF65-F5344CB8AC3E}">
@@ -6241,6 +6596,229 @@
           </a:p>
         </p:txBody>
       </p:sp>
+      <p:sp>
+        <p:nvSpPr>
+          <p:cNvPr id="6" name="Rounded Rectangle 5"/>
+          <p:cNvSpPr/>
+          <p:nvPr/>
+        </p:nvSpPr>
+        <p:spPr>
+          <a:xfrm>
+            <a:off x="777240" y="1463040"/>
+            <a:ext cx="10607040" cy="4754880"/>
+          </a:xfrm>
+          <a:prstGeom prst="roundRect">
+            <a:avLst/>
+          </a:prstGeom>
+          <a:solidFill>
+            <a:srgbClr val="F8FAFC"/>
+          </a:solidFill>
+          <a:ln w="19050">
+            <a:solidFill>
+              <a:srgbClr val="CBD5E1"/>
+            </a:solidFill>
+          </a:ln>
+        </p:spPr>
+        <p:style>
+          <a:lnRef idx="1">
+            <a:schemeClr val="accent1"/>
+          </a:lnRef>
+          <a:fillRef idx="3">
+            <a:schemeClr val="accent1"/>
+          </a:fillRef>
+          <a:effectRef idx="2">
+            <a:schemeClr val="accent1"/>
+          </a:effectRef>
+          <a:fontRef idx="minor">
+            <a:schemeClr val="lt1"/>
+          </a:fontRef>
+        </p:style>
+        <p:txBody>
+          <a:bodyPr rtlCol="0" anchor="ctr" wrap="square" lIns="182880" rIns="182880" tIns="164592" bIns="164592"/>
+          <a:lstStyle/>
+          <a:p>
+            <a:pPr algn="ctr">
+              <a:spcAft>
+                <a:spcPts val="800"/>
+              </a:spcAft>
+              <a:defRPr sz="1400" b="1">
+                <a:solidFill>
+                  <a:srgbClr val="10B981"/>
+                </a:solidFill>
+                <a:latin typeface="Calibri"/>
+              </a:defRPr>
+            </a:pPr>
+            <a:r>
+              <a:t>Submission Compliance &amp; Deliverables Verification</a:t>
+            </a:r>
+          </a:p>
+          <a:p>
+            <a:pPr>
+              <a:spcAft>
+                <a:spcPts val="200"/>
+              </a:spcAft>
+            </a:pPr>
+            <a:r>
+              <a:rPr b="1" sz="1200">
+                <a:solidFill>
+                  <a:srgbClr val="1E293B"/>
+                </a:solidFill>
+                <a:latin typeface="Calibri"/>
+              </a:rPr>
+              <a:t>✔ Working prototype code — public or shared GitHub repo: </a:t>
+            </a:r>
+            <a:r>
+              <a:rPr b="1" sz="1200">
+                <a:solidFill>
+                  <a:srgbClr val="10B981"/>
+                </a:solidFill>
+                <a:latin typeface="Calibri"/>
+              </a:rPr>
+              <a:t>YES (Y)</a:t>
+            </a:r>
+          </a:p>
+          <a:p>
+            <a:pPr>
+              <a:spcAft>
+                <a:spcPts val="800"/>
+              </a:spcAft>
+            </a:pPr>
+            <a:r>
+              <a:rPr sz="1050">
+                <a:solidFill>
+                  <a:srgbClr val="334155"/>
+                </a:solidFill>
+                <a:latin typeface="Calibri"/>
+              </a:rPr>
+              <a:t>   Repository URL: https://github.com/abhinav29102005/ultron
+   Full source code with modular streaming RAG, session management, and test suites.</a:t>
+            </a:r>
+          </a:p>
+          <a:p>
+            <a:pPr>
+              <a:spcAft>
+                <a:spcPts val="200"/>
+              </a:spcAft>
+            </a:pPr>
+            <a:r>
+              <a:rPr b="1" sz="1200">
+                <a:solidFill>
+                  <a:srgbClr val="1E293B"/>
+                </a:solidFill>
+                <a:latin typeface="Calibri"/>
+              </a:rPr>
+              <a:t>✔ README with reproducible setup instructions: </a:t>
+            </a:r>
+            <a:r>
+              <a:rPr b="1" sz="1200">
+                <a:solidFill>
+                  <a:srgbClr val="10B981"/>
+                </a:solidFill>
+                <a:latin typeface="Calibri"/>
+              </a:rPr>
+              <a:t>YES (Y)</a:t>
+            </a:r>
+          </a:p>
+          <a:p>
+            <a:pPr>
+              <a:spcAft>
+                <a:spcPts val="800"/>
+              </a:spcAft>
+            </a:pPr>
+            <a:r>
+              <a:rPr sz="1050">
+                <a:solidFill>
+                  <a:srgbClr val="334155"/>
+                </a:solidFill>
+                <a:latin typeface="Calibri"/>
+              </a:rPr>
+              <a:t>   Detailed step-by-step setup, Python 3.11+ environment configuration, API key setup wizard, and benchmark runner.</a:t>
+            </a:r>
+          </a:p>
+          <a:p>
+            <a:pPr>
+              <a:spcAft>
+                <a:spcPts val="200"/>
+              </a:spcAft>
+            </a:pPr>
+            <a:r>
+              <a:rPr b="1" sz="1200">
+                <a:solidFill>
+                  <a:srgbClr val="1E293B"/>
+                </a:solidFill>
+                <a:latin typeface="Calibri"/>
+              </a:rPr>
+              <a:t>✔ Demo video, max 5 minutes (YouTube or Drive link): </a:t>
+            </a:r>
+            <a:r>
+              <a:rPr b="1" sz="1200">
+                <a:solidFill>
+                  <a:srgbClr val="10B981"/>
+                </a:solidFill>
+                <a:latin typeface="Calibri"/>
+              </a:rPr>
+              <a:t>YES (Y)</a:t>
+            </a:r>
+          </a:p>
+          <a:p>
+            <a:pPr>
+              <a:spcAft>
+                <a:spcPts val="800"/>
+              </a:spcAft>
+            </a:pPr>
+            <a:r>
+              <a:rPr sz="1050">
+                <a:solidFill>
+                  <a:srgbClr val="334155"/>
+                </a:solidFill>
+                <a:latin typeface="Calibri"/>
+              </a:rPr>
+              <a:t>   Full 9-scene video walkthrough recorded using Ultron's built-in /demo harness with real-time Telemetry HUD.</a:t>
+            </a:r>
+          </a:p>
+          <a:p>
+            <a:pPr>
+              <a:spcAft>
+                <a:spcPts val="200"/>
+              </a:spcAft>
+            </a:pPr>
+            <a:r>
+              <a:rPr b="1" sz="1200">
+                <a:solidFill>
+                  <a:srgbClr val="1E293B"/>
+                </a:solidFill>
+                <a:latin typeface="Calibri"/>
+              </a:rPr>
+              <a:t>✔ Presentation file (PPT or PDF): </a:t>
+            </a:r>
+            <a:r>
+              <a:rPr b="1" sz="1200">
+                <a:solidFill>
+                  <a:srgbClr val="10B981"/>
+                </a:solidFill>
+                <a:latin typeface="Calibri"/>
+              </a:rPr>
+              <a:t>YES (Y)</a:t>
+            </a:r>
+          </a:p>
+          <a:p>
+            <a:pPr>
+              <a:spcAft>
+                <a:spcPts val="800"/>
+              </a:spcAft>
+            </a:pPr>
+            <a:r>
+              <a:rPr sz="1050">
+                <a:solidFill>
+                  <a:srgbClr val="334155"/>
+                </a:solidFill>
+                <a:latin typeface="Calibri"/>
+              </a:rPr>
+              <a:t>   Completed official template (CollegeName_TeamName_Submission.pptx / Thapar_4_Bottle_Codeka_Submission.pptx).</a:t>
+            </a:r>
+          </a:p>
+        </p:txBody>
+      </p:sp>
     </p:spTree>
     <p:extLst>
       <p:ext uri="{BB962C8B-B14F-4D97-AF65-F5344CB8AC3E}">
@@ -6946,6 +7524,205 @@
           </a:p>
         </p:txBody>
       </p:sp>
+      <p:sp>
+        <p:nvSpPr>
+          <p:cNvPr id="32" name="Rounded Rectangle 31"/>
+          <p:cNvSpPr/>
+          <p:nvPr/>
+        </p:nvSpPr>
+        <p:spPr>
+          <a:xfrm>
+            <a:off x="777240" y="1463040"/>
+            <a:ext cx="10607040" cy="4114800"/>
+          </a:xfrm>
+          <a:prstGeom prst="roundRect">
+            <a:avLst/>
+          </a:prstGeom>
+          <a:solidFill>
+            <a:srgbClr val="F8FAFC"/>
+          </a:solidFill>
+          <a:ln w="19050">
+            <a:solidFill>
+              <a:srgbClr val="CBD5E1"/>
+            </a:solidFill>
+          </a:ln>
+        </p:spPr>
+        <p:style>
+          <a:lnRef idx="1">
+            <a:schemeClr val="accent1"/>
+          </a:lnRef>
+          <a:fillRef idx="3">
+            <a:schemeClr val="accent1"/>
+          </a:fillRef>
+          <a:effectRef idx="2">
+            <a:schemeClr val="accent1"/>
+          </a:effectRef>
+          <a:fontRef idx="minor">
+            <a:schemeClr val="lt1"/>
+          </a:fontRef>
+        </p:style>
+        <p:txBody>
+          <a:bodyPr rtlCol="0" anchor="ctr" wrap="square" lIns="182880" rIns="182880" tIns="164592" bIns="164592"/>
+          <a:lstStyle/>
+          <a:p>
+            <a:pPr algn="ctr">
+              <a:spcAft>
+                <a:spcPts val="800"/>
+              </a:spcAft>
+              <a:defRPr sz="1400" b="1">
+                <a:solidFill>
+                  <a:srgbClr val="704EA6"/>
+                </a:solidFill>
+                <a:latin typeface="Calibri"/>
+              </a:defRPr>
+            </a:pPr>
+            <a:r>
+              <a:t>Team: 4 Bottle Codeka</a:t>
+            </a:r>
+          </a:p>
+          <a:p>
+            <a:pPr>
+              <a:spcAft>
+                <a:spcPts val="1400"/>
+              </a:spcAft>
+              <a:defRPr sz="1400" b="1">
+                <a:solidFill>
+                  <a:srgbClr val="1E293B"/>
+                </a:solidFill>
+                <a:latin typeface="Calibri"/>
+              </a:defRPr>
+            </a:pPr>
+            <a:r>
+              <a:t>Thapar Institute of Engineering &amp; Technology, Patiala</a:t>
+            </a:r>
+          </a:p>
+          <a:p>
+            <a:pPr>
+              <a:spcAft>
+                <a:spcPts val="400"/>
+              </a:spcAft>
+            </a:pPr>
+            <a:r>
+              <a:rPr b="1" sz="1200">
+                <a:solidFill>
+                  <a:srgbClr val="1E293B"/>
+                </a:solidFill>
+                <a:latin typeface="Calibri"/>
+              </a:rPr>
+              <a:t>• Abhinav Kumar Singh (Team Leader): </a:t>
+            </a:r>
+            <a:r>
+              <a:rPr sz="1200">
+                <a:solidFill>
+                  <a:srgbClr val="334155"/>
+                </a:solidFill>
+                <a:latin typeface="Calibri"/>
+              </a:rPr>
+              <a:t>asingh2910.official@gmail.com | +91-6398779479</a:t>
+            </a:r>
+          </a:p>
+          <a:p>
+            <a:pPr>
+              <a:spcAft>
+                <a:spcPts val="400"/>
+              </a:spcAft>
+            </a:pPr>
+            <a:r>
+              <a:rPr b="1" sz="1200">
+                <a:solidFill>
+                  <a:srgbClr val="1E293B"/>
+                </a:solidFill>
+                <a:latin typeface="Calibri"/>
+              </a:rPr>
+              <a:t>• Sukhansh Mittal: </a:t>
+            </a:r>
+            <a:r>
+              <a:rPr sz="1200">
+                <a:solidFill>
+                  <a:srgbClr val="334155"/>
+                </a:solidFill>
+                <a:latin typeface="Calibri"/>
+              </a:rPr>
+              <a:t>smittal_be24@thapar.edu | +91-9877366331</a:t>
+            </a:r>
+          </a:p>
+          <a:p>
+            <a:pPr>
+              <a:spcAft>
+                <a:spcPts val="400"/>
+              </a:spcAft>
+            </a:pPr>
+            <a:r>
+              <a:rPr b="1" sz="1200">
+                <a:solidFill>
+                  <a:srgbClr val="1E293B"/>
+                </a:solidFill>
+                <a:latin typeface="Calibri"/>
+              </a:rPr>
+              <a:t>• Lakkshya Jha: </a:t>
+            </a:r>
+            <a:r>
+              <a:rPr sz="1200">
+                <a:solidFill>
+                  <a:srgbClr val="334155"/>
+                </a:solidFill>
+                <a:latin typeface="Calibri"/>
+              </a:rPr>
+              <a:t>ljha_be24@thapar.edu | +91-9574875069</a:t>
+            </a:r>
+          </a:p>
+          <a:p>
+            <a:pPr>
+              <a:spcAft>
+                <a:spcPts val="400"/>
+              </a:spcAft>
+            </a:pPr>
+            <a:r>
+              <a:rPr b="1" sz="1200">
+                <a:solidFill>
+                  <a:srgbClr val="1E293B"/>
+                </a:solidFill>
+                <a:latin typeface="Calibri"/>
+              </a:rPr>
+              <a:t>• Vikramaditya Singh: </a:t>
+            </a:r>
+            <a:r>
+              <a:rPr sz="1200">
+                <a:solidFill>
+                  <a:srgbClr val="334155"/>
+                </a:solidFill>
+                <a:latin typeface="Calibri"/>
+              </a:rPr>
+              <a:t>vsingh1_be24@thapar.edu | +91-6239134155</a:t>
+            </a:r>
+          </a:p>
+          <a:p>
+            <a:pPr>
+              <a:spcBef>
+                <a:spcPts val="1200"/>
+              </a:spcBef>
+            </a:pPr>
+            <a:r>
+              <a:rPr b="1" sz="1300">
+                <a:solidFill>
+                  <a:srgbClr val="0284C7"/>
+                </a:solidFill>
+                <a:latin typeface="Calibri"/>
+              </a:rPr>
+              <a:t>🔗 GitHub Repository: </a:t>
+            </a:r>
+            <a:r>
+              <a:rPr b="1" sz="1300">
+                <a:solidFill>
+                  <a:srgbClr val="1E293B"/>
+                </a:solidFill>
+                <a:latin typeface="Calibri"/>
+              </a:rPr>
+              <a:t>https://github.com/abhinav29102005/ultron</a:t>
+            </a:r>
+          </a:p>
+        </p:txBody>
+      </p:sp>
     </p:spTree>
   </p:cSld>
   <p:clrMapOvr>
@@ -7008,7 +7785,7 @@
               </a:defRPr>
             </a:pPr>
             <a:r>
-              <a:t>Theme 4: Streaming Live RAG (Real-Time Grounding &amp; Speculative Retrieval)</a:t>
+              <a:t>Problem Statement &amp; Motivation</a:t>
             </a:r>
           </a:p>
         </p:txBody>
@@ -8032,6 +8809,978 @@
                 <a:latin typeface="Calibri"/>
               </a:rPr>
               <a:t>Exact section citations ('[Doc_POLICY §XX]') across 21 corporate policy sections with zero parametric hallucination.</a:t>
+            </a:r>
+          </a:p>
+        </p:txBody>
+      </p:sp>
+      <p:sp>
+        <p:nvSpPr>
+          <p:cNvPr id="9" name="Rounded Rectangle 8"/>
+          <p:cNvSpPr/>
+          <p:nvPr/>
+        </p:nvSpPr>
+        <p:spPr>
+          <a:xfrm>
+            <a:off x="777240" y="1371600"/>
+            <a:ext cx="5166360" cy="2011680"/>
+          </a:xfrm>
+          <a:prstGeom prst="roundRect">
+            <a:avLst/>
+          </a:prstGeom>
+          <a:solidFill>
+            <a:srgbClr val="F8FAFC"/>
+          </a:solidFill>
+          <a:ln w="19050">
+            <a:solidFill>
+              <a:srgbClr val="CBD5E1"/>
+            </a:solidFill>
+          </a:ln>
+        </p:spPr>
+        <p:style>
+          <a:lnRef idx="1">
+            <a:schemeClr val="accent1"/>
+          </a:lnRef>
+          <a:fillRef idx="3">
+            <a:schemeClr val="accent1"/>
+          </a:fillRef>
+          <a:effectRef idx="2">
+            <a:schemeClr val="accent1"/>
+          </a:effectRef>
+          <a:fontRef idx="minor">
+            <a:schemeClr val="lt1"/>
+          </a:fontRef>
+        </p:style>
+        <p:txBody>
+          <a:bodyPr rtlCol="0" anchor="ctr" wrap="square" lIns="182880" rIns="182880" tIns="164592" bIns="164592"/>
+          <a:lstStyle/>
+          <a:p>
+            <a:pPr algn="ctr">
+              <a:spcAft>
+                <a:spcPts val="800"/>
+              </a:spcAft>
+              <a:defRPr sz="1400" b="1">
+                <a:solidFill>
+                  <a:srgbClr val="0284C7"/>
+                </a:solidFill>
+                <a:latin typeface="Calibri"/>
+              </a:defRPr>
+            </a:pPr>
+            <a:r>
+              <a:t>The Voice Latency Bottleneck</a:t>
+            </a:r>
+          </a:p>
+          <a:p>
+            <a:pPr>
+              <a:spcAft>
+                <a:spcPts val="600"/>
+              </a:spcAft>
+            </a:pPr>
+            <a:r>
+              <a:rPr b="1" sz="1100">
+                <a:solidFill>
+                  <a:srgbClr val="1E293B"/>
+                </a:solidFill>
+                <a:latin typeface="Calibri"/>
+              </a:rPr>
+              <a:t>• Synchronous Waiting: </a:t>
+            </a:r>
+            <a:r>
+              <a:rPr b="0" sz="1100">
+                <a:solidFill>
+                  <a:srgbClr val="334155"/>
+                </a:solidFill>
+                <a:latin typeface="Calibri"/>
+              </a:rPr>
+              <a:t>Traditional RAG waits for a user to finish speaking, processes ASR, chunks text, searches vectors, and only then streams output (often 1.5s - 3s latency).</a:t>
+            </a:r>
+          </a:p>
+          <a:p>
+            <a:pPr>
+              <a:spcAft>
+                <a:spcPts val="600"/>
+              </a:spcAft>
+            </a:pPr>
+            <a:r>
+              <a:rPr b="1" sz="1100">
+                <a:solidFill>
+                  <a:srgbClr val="1E293B"/>
+                </a:solidFill>
+                <a:latin typeface="Calibri"/>
+              </a:rPr>
+              <a:t>• Speech Corrections: </a:t>
+            </a:r>
+            <a:r>
+              <a:rPr b="0" sz="1100">
+                <a:solidFill>
+                  <a:srgbClr val="334155"/>
+                </a:solidFill>
+                <a:latin typeface="Calibri"/>
+              </a:rPr>
+              <a:t>If a user misspeaks ('Wait, no, I meant policy B'), traditional pipelines fetch stale context, leading to hallucinations.</a:t>
+            </a:r>
+          </a:p>
+        </p:txBody>
+      </p:sp>
+      <p:sp>
+        <p:nvSpPr>
+          <p:cNvPr id="10" name="Rounded Rectangle 9"/>
+          <p:cNvSpPr/>
+          <p:nvPr/>
+        </p:nvSpPr>
+        <p:spPr>
+          <a:xfrm>
+            <a:off x="6217920" y="1371600"/>
+            <a:ext cx="5166360" cy="2011680"/>
+          </a:xfrm>
+          <a:prstGeom prst="roundRect">
+            <a:avLst/>
+          </a:prstGeom>
+          <a:solidFill>
+            <a:srgbClr val="F8FAFC"/>
+          </a:solidFill>
+          <a:ln w="19050">
+            <a:solidFill>
+              <a:srgbClr val="CBD5E1"/>
+            </a:solidFill>
+          </a:ln>
+        </p:spPr>
+        <p:style>
+          <a:lnRef idx="1">
+            <a:schemeClr val="accent1"/>
+          </a:lnRef>
+          <a:fillRef idx="3">
+            <a:schemeClr val="accent1"/>
+          </a:fillRef>
+          <a:effectRef idx="2">
+            <a:schemeClr val="accent1"/>
+          </a:effectRef>
+          <a:fontRef idx="minor">
+            <a:schemeClr val="lt1"/>
+          </a:fontRef>
+        </p:style>
+        <p:txBody>
+          <a:bodyPr rtlCol="0" anchor="ctr" wrap="square" lIns="182880" rIns="182880" tIns="164592" bIns="164592"/>
+          <a:lstStyle/>
+          <a:p>
+            <a:pPr algn="ctr">
+              <a:spcAft>
+                <a:spcPts val="800"/>
+              </a:spcAft>
+              <a:defRPr sz="1400" b="1">
+                <a:solidFill>
+                  <a:srgbClr val="10B981"/>
+                </a:solidFill>
+                <a:latin typeface="Calibri"/>
+              </a:defRPr>
+            </a:pPr>
+            <a:r>
+              <a:t>Our Solution: Event-Driven Live RAG</a:t>
+            </a:r>
+          </a:p>
+          <a:p>
+            <a:pPr>
+              <a:spcAft>
+                <a:spcPts val="600"/>
+              </a:spcAft>
+            </a:pPr>
+            <a:r>
+              <a:rPr b="1" sz="1100">
+                <a:solidFill>
+                  <a:srgbClr val="1E293B"/>
+                </a:solidFill>
+                <a:latin typeface="Calibri"/>
+              </a:rPr>
+              <a:t>• Sub-Word Speculation: </a:t>
+            </a:r>
+            <a:r>
+              <a:rPr b="0" sz="1100">
+                <a:solidFill>
+                  <a:srgbClr val="334155"/>
+                </a:solidFill>
+                <a:latin typeface="Calibri"/>
+              </a:rPr>
+              <a:t>Triggering vector search at token 6-8, long before the sentence finishes.</a:t>
+            </a:r>
+          </a:p>
+          <a:p>
+            <a:pPr>
+              <a:spcAft>
+                <a:spcPts val="600"/>
+              </a:spcAft>
+            </a:pPr>
+            <a:r>
+              <a:rPr b="1" sz="1100">
+                <a:solidFill>
+                  <a:srgbClr val="1E293B"/>
+                </a:solidFill>
+                <a:latin typeface="Calibri"/>
+              </a:rPr>
+              <a:t>• Dynamic Mid-Stream Pivot: </a:t>
+            </a:r>
+            <a:r>
+              <a:rPr b="0" sz="1100">
+                <a:solidFill>
+                  <a:srgbClr val="334155"/>
+                </a:solidFill>
+                <a:latin typeface="Calibri"/>
+              </a:rPr>
+              <a:t>If the user corrects themselves, the pipeline detects the diff, aborts the in-flight vector query, and updates the intent.</a:t>
+            </a:r>
+          </a:p>
+        </p:txBody>
+      </p:sp>
+      <p:sp>
+        <p:nvSpPr>
+          <p:cNvPr id="11" name="Rounded Rectangle 10"/>
+          <p:cNvSpPr/>
+          <p:nvPr/>
+        </p:nvSpPr>
+        <p:spPr>
+          <a:xfrm>
+            <a:off x="777240" y="3566160"/>
+            <a:ext cx="10607040" cy="2651760"/>
+          </a:xfrm>
+          <a:prstGeom prst="roundRect">
+            <a:avLst/>
+          </a:prstGeom>
+          <a:solidFill>
+            <a:srgbClr val="F8FAFC"/>
+          </a:solidFill>
+          <a:ln w="19050">
+            <a:solidFill>
+              <a:srgbClr val="CBD5E1"/>
+            </a:solidFill>
+          </a:ln>
+        </p:spPr>
+        <p:style>
+          <a:lnRef idx="1">
+            <a:schemeClr val="accent1"/>
+          </a:lnRef>
+          <a:fillRef idx="3">
+            <a:schemeClr val="accent1"/>
+          </a:fillRef>
+          <a:effectRef idx="2">
+            <a:schemeClr val="accent1"/>
+          </a:effectRef>
+          <a:fontRef idx="minor">
+            <a:schemeClr val="lt1"/>
+          </a:fontRef>
+        </p:style>
+        <p:txBody>
+          <a:bodyPr rtlCol="0" anchor="ctr" wrap="square" lIns="182880" rIns="182880" tIns="164592" bIns="164592"/>
+          <a:lstStyle/>
+          <a:p>
+            <a:pPr algn="ctr">
+              <a:spcAft>
+                <a:spcPts val="800"/>
+              </a:spcAft>
+              <a:defRPr sz="1400" b="1">
+                <a:solidFill>
+                  <a:srgbClr val="704EA6"/>
+                </a:solidFill>
+                <a:latin typeface="Calibri"/>
+              </a:defRPr>
+            </a:pPr>
+            <a:r>
+              <a:t>Flowchart: Traditional RAG vs Ultron Streaming RAG</a:t>
+            </a:r>
+          </a:p>
+        </p:txBody>
+      </p:sp>
+      <p:sp>
+        <p:nvSpPr>
+          <p:cNvPr id="12" name="Rounded Rectangle 11"/>
+          <p:cNvSpPr/>
+          <p:nvPr/>
+        </p:nvSpPr>
+        <p:spPr>
+          <a:xfrm>
+            <a:off x="1005840" y="4114800"/>
+            <a:ext cx="1645920" cy="548640"/>
+          </a:xfrm>
+          <a:prstGeom prst="roundRect">
+            <a:avLst/>
+          </a:prstGeom>
+          <a:solidFill>
+            <a:srgbClr val="F8FAFC"/>
+          </a:solidFill>
+          <a:ln w="19050">
+            <a:solidFill>
+              <a:srgbClr val="CBD5E1"/>
+            </a:solidFill>
+          </a:ln>
+        </p:spPr>
+        <p:style>
+          <a:lnRef idx="1">
+            <a:schemeClr val="accent1"/>
+          </a:lnRef>
+          <a:fillRef idx="3">
+            <a:schemeClr val="accent1"/>
+          </a:fillRef>
+          <a:effectRef idx="2">
+            <a:schemeClr val="accent1"/>
+          </a:effectRef>
+          <a:fontRef idx="minor">
+            <a:schemeClr val="lt1"/>
+          </a:fontRef>
+        </p:style>
+        <p:txBody>
+          <a:bodyPr rtlCol="0" anchor="ctr" wrap="square"/>
+          <a:lstStyle/>
+          <a:p>
+            <a:pPr algn="ctr">
+              <a:defRPr sz="1100" b="1">
+                <a:solidFill>
+                  <a:srgbClr val="1E293B"/>
+                </a:solidFill>
+                <a:latin typeface="Calibri"/>
+              </a:defRPr>
+            </a:pPr>
+            <a:r>
+              <a:t>User Speaks (Wait for EOS)</a:t>
+            </a:r>
+          </a:p>
+        </p:txBody>
+      </p:sp>
+      <p:sp>
+        <p:nvSpPr>
+          <p:cNvPr id="13" name="Right Arrow 12"/>
+          <p:cNvSpPr/>
+          <p:nvPr/>
+        </p:nvSpPr>
+        <p:spPr>
+          <a:xfrm>
+            <a:off x="2743200" y="4251960"/>
+            <a:ext cx="365760" cy="274320"/>
+          </a:xfrm>
+          <a:prstGeom prst="rightArrow">
+            <a:avLst/>
+          </a:prstGeom>
+          <a:solidFill>
+            <a:srgbClr val="CBD5E1"/>
+          </a:solidFill>
+          <a:ln>
+            <a:noFill/>
+          </a:ln>
+        </p:spPr>
+        <p:style>
+          <a:lnRef idx="1">
+            <a:schemeClr val="accent1"/>
+          </a:lnRef>
+          <a:fillRef idx="3">
+            <a:schemeClr val="accent1"/>
+          </a:fillRef>
+          <a:effectRef idx="2">
+            <a:schemeClr val="accent1"/>
+          </a:effectRef>
+          <a:fontRef idx="minor">
+            <a:schemeClr val="lt1"/>
+          </a:fontRef>
+        </p:style>
+        <p:txBody>
+          <a:bodyPr rtlCol="0" anchor="ctr"/>
+          <a:lstStyle/>
+          <a:p>
+            <a:pPr algn="ctr"/>
+          </a:p>
+        </p:txBody>
+      </p:sp>
+      <p:sp>
+        <p:nvSpPr>
+          <p:cNvPr id="14" name="Rounded Rectangle 13"/>
+          <p:cNvSpPr/>
+          <p:nvPr/>
+        </p:nvSpPr>
+        <p:spPr>
+          <a:xfrm>
+            <a:off x="3200400" y="4114800"/>
+            <a:ext cx="1645920" cy="548640"/>
+          </a:xfrm>
+          <a:prstGeom prst="roundRect">
+            <a:avLst/>
+          </a:prstGeom>
+          <a:solidFill>
+            <a:srgbClr val="F8FAFC"/>
+          </a:solidFill>
+          <a:ln w="19050">
+            <a:solidFill>
+              <a:srgbClr val="CBD5E1"/>
+            </a:solidFill>
+          </a:ln>
+        </p:spPr>
+        <p:style>
+          <a:lnRef idx="1">
+            <a:schemeClr val="accent1"/>
+          </a:lnRef>
+          <a:fillRef idx="3">
+            <a:schemeClr val="accent1"/>
+          </a:fillRef>
+          <a:effectRef idx="2">
+            <a:schemeClr val="accent1"/>
+          </a:effectRef>
+          <a:fontRef idx="minor">
+            <a:schemeClr val="lt1"/>
+          </a:fontRef>
+        </p:style>
+        <p:txBody>
+          <a:bodyPr rtlCol="0" anchor="ctr" wrap="square"/>
+          <a:lstStyle/>
+          <a:p>
+            <a:pPr algn="ctr">
+              <a:defRPr sz="1100" b="1">
+                <a:solidFill>
+                  <a:srgbClr val="1E293B"/>
+                </a:solidFill>
+                <a:latin typeface="Calibri"/>
+              </a:defRPr>
+            </a:pPr>
+            <a:r>
+              <a:t>ASR Transcribe</a:t>
+            </a:r>
+          </a:p>
+        </p:txBody>
+      </p:sp>
+      <p:sp>
+        <p:nvSpPr>
+          <p:cNvPr id="15" name="Right Arrow 14"/>
+          <p:cNvSpPr/>
+          <p:nvPr/>
+        </p:nvSpPr>
+        <p:spPr>
+          <a:xfrm>
+            <a:off x="4937760" y="4251960"/>
+            <a:ext cx="365760" cy="274320"/>
+          </a:xfrm>
+          <a:prstGeom prst="rightArrow">
+            <a:avLst/>
+          </a:prstGeom>
+          <a:solidFill>
+            <a:srgbClr val="CBD5E1"/>
+          </a:solidFill>
+          <a:ln>
+            <a:noFill/>
+          </a:ln>
+        </p:spPr>
+        <p:style>
+          <a:lnRef idx="1">
+            <a:schemeClr val="accent1"/>
+          </a:lnRef>
+          <a:fillRef idx="3">
+            <a:schemeClr val="accent1"/>
+          </a:fillRef>
+          <a:effectRef idx="2">
+            <a:schemeClr val="accent1"/>
+          </a:effectRef>
+          <a:fontRef idx="minor">
+            <a:schemeClr val="lt1"/>
+          </a:fontRef>
+        </p:style>
+        <p:txBody>
+          <a:bodyPr rtlCol="0" anchor="ctr"/>
+          <a:lstStyle/>
+          <a:p>
+            <a:pPr algn="ctr"/>
+          </a:p>
+        </p:txBody>
+      </p:sp>
+      <p:sp>
+        <p:nvSpPr>
+          <p:cNvPr id="16" name="Rounded Rectangle 15"/>
+          <p:cNvSpPr/>
+          <p:nvPr/>
+        </p:nvSpPr>
+        <p:spPr>
+          <a:xfrm>
+            <a:off x="5394960" y="4114800"/>
+            <a:ext cx="1645920" cy="548640"/>
+          </a:xfrm>
+          <a:prstGeom prst="roundRect">
+            <a:avLst/>
+          </a:prstGeom>
+          <a:solidFill>
+            <a:srgbClr val="F8FAFC"/>
+          </a:solidFill>
+          <a:ln w="19050">
+            <a:solidFill>
+              <a:srgbClr val="CBD5E1"/>
+            </a:solidFill>
+          </a:ln>
+        </p:spPr>
+        <p:style>
+          <a:lnRef idx="1">
+            <a:schemeClr val="accent1"/>
+          </a:lnRef>
+          <a:fillRef idx="3">
+            <a:schemeClr val="accent1"/>
+          </a:fillRef>
+          <a:effectRef idx="2">
+            <a:schemeClr val="accent1"/>
+          </a:effectRef>
+          <a:fontRef idx="minor">
+            <a:schemeClr val="lt1"/>
+          </a:fontRef>
+        </p:style>
+        <p:txBody>
+          <a:bodyPr rtlCol="0" anchor="ctr" wrap="square"/>
+          <a:lstStyle/>
+          <a:p>
+            <a:pPr algn="ctr">
+              <a:defRPr sz="1100" b="1">
+                <a:solidFill>
+                  <a:srgbClr val="1E293B"/>
+                </a:solidFill>
+                <a:latin typeface="Calibri"/>
+              </a:defRPr>
+            </a:pPr>
+            <a:r>
+              <a:t>Vector Search (Blocks!)</a:t>
+            </a:r>
+          </a:p>
+        </p:txBody>
+      </p:sp>
+      <p:sp>
+        <p:nvSpPr>
+          <p:cNvPr id="17" name="Right Arrow 16"/>
+          <p:cNvSpPr/>
+          <p:nvPr/>
+        </p:nvSpPr>
+        <p:spPr>
+          <a:xfrm>
+            <a:off x="7132320" y="4251960"/>
+            <a:ext cx="365760" cy="274320"/>
+          </a:xfrm>
+          <a:prstGeom prst="rightArrow">
+            <a:avLst/>
+          </a:prstGeom>
+          <a:solidFill>
+            <a:srgbClr val="CBD5E1"/>
+          </a:solidFill>
+          <a:ln>
+            <a:noFill/>
+          </a:ln>
+        </p:spPr>
+        <p:style>
+          <a:lnRef idx="1">
+            <a:schemeClr val="accent1"/>
+          </a:lnRef>
+          <a:fillRef idx="3">
+            <a:schemeClr val="accent1"/>
+          </a:fillRef>
+          <a:effectRef idx="2">
+            <a:schemeClr val="accent1"/>
+          </a:effectRef>
+          <a:fontRef idx="minor">
+            <a:schemeClr val="lt1"/>
+          </a:fontRef>
+        </p:style>
+        <p:txBody>
+          <a:bodyPr rtlCol="0" anchor="ctr"/>
+          <a:lstStyle/>
+          <a:p>
+            <a:pPr algn="ctr"/>
+          </a:p>
+        </p:txBody>
+      </p:sp>
+      <p:sp>
+        <p:nvSpPr>
+          <p:cNvPr id="18" name="Rounded Rectangle 17"/>
+          <p:cNvSpPr/>
+          <p:nvPr/>
+        </p:nvSpPr>
+        <p:spPr>
+          <a:xfrm>
+            <a:off x="7589520" y="4114800"/>
+            <a:ext cx="1645920" cy="548640"/>
+          </a:xfrm>
+          <a:prstGeom prst="roundRect">
+            <a:avLst/>
+          </a:prstGeom>
+          <a:solidFill>
+            <a:srgbClr val="FEE2E2"/>
+          </a:solidFill>
+          <a:ln w="19050">
+            <a:solidFill>
+              <a:srgbClr val="CBD5E1"/>
+            </a:solidFill>
+          </a:ln>
+        </p:spPr>
+        <p:style>
+          <a:lnRef idx="1">
+            <a:schemeClr val="accent1"/>
+          </a:lnRef>
+          <a:fillRef idx="3">
+            <a:schemeClr val="accent1"/>
+          </a:fillRef>
+          <a:effectRef idx="2">
+            <a:schemeClr val="accent1"/>
+          </a:effectRef>
+          <a:fontRef idx="minor">
+            <a:schemeClr val="lt1"/>
+          </a:fontRef>
+        </p:style>
+        <p:txBody>
+          <a:bodyPr rtlCol="0" anchor="ctr" wrap="square"/>
+          <a:lstStyle/>
+          <a:p>
+            <a:pPr algn="ctr">
+              <a:defRPr sz="1100" b="1">
+                <a:solidFill>
+                  <a:srgbClr val="1E293B"/>
+                </a:solidFill>
+                <a:latin typeface="Calibri"/>
+              </a:defRPr>
+            </a:pPr>
+            <a:r>
+              <a:t>LLM Generation</a:t>
+            </a:r>
+          </a:p>
+        </p:txBody>
+      </p:sp>
+      <p:sp>
+        <p:nvSpPr>
+          <p:cNvPr id="19" name="Rounded Rectangle 18"/>
+          <p:cNvSpPr/>
+          <p:nvPr/>
+        </p:nvSpPr>
+        <p:spPr>
+          <a:xfrm>
+            <a:off x="1005840" y="5120640"/>
+            <a:ext cx="1645920" cy="548640"/>
+          </a:xfrm>
+          <a:prstGeom prst="roundRect">
+            <a:avLst/>
+          </a:prstGeom>
+          <a:solidFill>
+            <a:srgbClr val="F8FAFC"/>
+          </a:solidFill>
+          <a:ln w="19050">
+            <a:solidFill>
+              <a:srgbClr val="CBD5E1"/>
+            </a:solidFill>
+          </a:ln>
+        </p:spPr>
+        <p:style>
+          <a:lnRef idx="1">
+            <a:schemeClr val="accent1"/>
+          </a:lnRef>
+          <a:fillRef idx="3">
+            <a:schemeClr val="accent1"/>
+          </a:fillRef>
+          <a:effectRef idx="2">
+            <a:schemeClr val="accent1"/>
+          </a:effectRef>
+          <a:fontRef idx="minor">
+            <a:schemeClr val="lt1"/>
+          </a:fontRef>
+        </p:style>
+        <p:txBody>
+          <a:bodyPr rtlCol="0" anchor="ctr" wrap="square"/>
+          <a:lstStyle/>
+          <a:p>
+            <a:pPr algn="ctr">
+              <a:defRPr sz="1100" b="1">
+                <a:solidFill>
+                  <a:srgbClr val="1E293B"/>
+                </a:solidFill>
+                <a:latin typeface="Calibri"/>
+              </a:defRPr>
+            </a:pPr>
+            <a:r>
+              <a:t>User Speaks (Token 6-8)</a:t>
+            </a:r>
+          </a:p>
+        </p:txBody>
+      </p:sp>
+      <p:sp>
+        <p:nvSpPr>
+          <p:cNvPr id="20" name="Right Arrow 19"/>
+          <p:cNvSpPr/>
+          <p:nvPr/>
+        </p:nvSpPr>
+        <p:spPr>
+          <a:xfrm>
+            <a:off x="2743200" y="5257800"/>
+            <a:ext cx="365760" cy="274320"/>
+          </a:xfrm>
+          <a:prstGeom prst="rightArrow">
+            <a:avLst/>
+          </a:prstGeom>
+          <a:solidFill>
+            <a:srgbClr val="CBD5E1"/>
+          </a:solidFill>
+          <a:ln>
+            <a:noFill/>
+          </a:ln>
+        </p:spPr>
+        <p:style>
+          <a:lnRef idx="1">
+            <a:schemeClr val="accent1"/>
+          </a:lnRef>
+          <a:fillRef idx="3">
+            <a:schemeClr val="accent1"/>
+          </a:fillRef>
+          <a:effectRef idx="2">
+            <a:schemeClr val="accent1"/>
+          </a:effectRef>
+          <a:fontRef idx="minor">
+            <a:schemeClr val="lt1"/>
+          </a:fontRef>
+        </p:style>
+        <p:txBody>
+          <a:bodyPr rtlCol="0" anchor="ctr"/>
+          <a:lstStyle/>
+          <a:p>
+            <a:pPr algn="ctr"/>
+          </a:p>
+        </p:txBody>
+      </p:sp>
+      <p:sp>
+        <p:nvSpPr>
+          <p:cNvPr id="21" name="Rounded Rectangle 20"/>
+          <p:cNvSpPr/>
+          <p:nvPr/>
+        </p:nvSpPr>
+        <p:spPr>
+          <a:xfrm>
+            <a:off x="3200400" y="5120640"/>
+            <a:ext cx="1645920" cy="548640"/>
+          </a:xfrm>
+          <a:prstGeom prst="roundRect">
+            <a:avLst/>
+          </a:prstGeom>
+          <a:solidFill>
+            <a:srgbClr val="F8FAFC"/>
+          </a:solidFill>
+          <a:ln w="19050">
+            <a:solidFill>
+              <a:srgbClr val="CBD5E1"/>
+            </a:solidFill>
+          </a:ln>
+        </p:spPr>
+        <p:style>
+          <a:lnRef idx="1">
+            <a:schemeClr val="accent1"/>
+          </a:lnRef>
+          <a:fillRef idx="3">
+            <a:schemeClr val="accent1"/>
+          </a:fillRef>
+          <a:effectRef idx="2">
+            <a:schemeClr val="accent1"/>
+          </a:effectRef>
+          <a:fontRef idx="minor">
+            <a:schemeClr val="lt1"/>
+          </a:fontRef>
+        </p:style>
+        <p:txBody>
+          <a:bodyPr rtlCol="0" anchor="ctr" wrap="square"/>
+          <a:lstStyle/>
+          <a:p>
+            <a:pPr algn="ctr">
+              <a:defRPr sz="1100" b="1">
+                <a:solidFill>
+                  <a:srgbClr val="1E293B"/>
+                </a:solidFill>
+                <a:latin typeface="Calibri"/>
+              </a:defRPr>
+            </a:pPr>
+            <a:r>
+              <a:t>Speculative Trigger</a:t>
+            </a:r>
+          </a:p>
+        </p:txBody>
+      </p:sp>
+      <p:sp>
+        <p:nvSpPr>
+          <p:cNvPr id="22" name="Right Arrow 21"/>
+          <p:cNvSpPr/>
+          <p:nvPr/>
+        </p:nvSpPr>
+        <p:spPr>
+          <a:xfrm>
+            <a:off x="4937760" y="5257800"/>
+            <a:ext cx="365760" cy="274320"/>
+          </a:xfrm>
+          <a:prstGeom prst="rightArrow">
+            <a:avLst/>
+          </a:prstGeom>
+          <a:solidFill>
+            <a:srgbClr val="CBD5E1"/>
+          </a:solidFill>
+          <a:ln>
+            <a:noFill/>
+          </a:ln>
+        </p:spPr>
+        <p:style>
+          <a:lnRef idx="1">
+            <a:schemeClr val="accent1"/>
+          </a:lnRef>
+          <a:fillRef idx="3">
+            <a:schemeClr val="accent1"/>
+          </a:fillRef>
+          <a:effectRef idx="2">
+            <a:schemeClr val="accent1"/>
+          </a:effectRef>
+          <a:fontRef idx="minor">
+            <a:schemeClr val="lt1"/>
+          </a:fontRef>
+        </p:style>
+        <p:txBody>
+          <a:bodyPr rtlCol="0" anchor="ctr"/>
+          <a:lstStyle/>
+          <a:p>
+            <a:pPr algn="ctr"/>
+          </a:p>
+        </p:txBody>
+      </p:sp>
+      <p:sp>
+        <p:nvSpPr>
+          <p:cNvPr id="23" name="Rounded Rectangle 22"/>
+          <p:cNvSpPr/>
+          <p:nvPr/>
+        </p:nvSpPr>
+        <p:spPr>
+          <a:xfrm>
+            <a:off x="5394960" y="5120640"/>
+            <a:ext cx="1645920" cy="548640"/>
+          </a:xfrm>
+          <a:prstGeom prst="roundRect">
+            <a:avLst/>
+          </a:prstGeom>
+          <a:solidFill>
+            <a:srgbClr val="F8FAFC"/>
+          </a:solidFill>
+          <a:ln w="19050">
+            <a:solidFill>
+              <a:srgbClr val="CBD5E1"/>
+            </a:solidFill>
+          </a:ln>
+        </p:spPr>
+        <p:style>
+          <a:lnRef idx="1">
+            <a:schemeClr val="accent1"/>
+          </a:lnRef>
+          <a:fillRef idx="3">
+            <a:schemeClr val="accent1"/>
+          </a:fillRef>
+          <a:effectRef idx="2">
+            <a:schemeClr val="accent1"/>
+          </a:effectRef>
+          <a:fontRef idx="minor">
+            <a:schemeClr val="lt1"/>
+          </a:fontRef>
+        </p:style>
+        <p:txBody>
+          <a:bodyPr rtlCol="0" anchor="ctr" wrap="square"/>
+          <a:lstStyle/>
+          <a:p>
+            <a:pPr algn="ctr">
+              <a:defRPr sz="1100" b="1">
+                <a:solidFill>
+                  <a:srgbClr val="1E293B"/>
+                </a:solidFill>
+                <a:latin typeface="Calibri"/>
+              </a:defRPr>
+            </a:pPr>
+            <a:r>
+              <a:t>Parallel Multi-Intent DB</a:t>
+            </a:r>
+          </a:p>
+        </p:txBody>
+      </p:sp>
+      <p:sp>
+        <p:nvSpPr>
+          <p:cNvPr id="24" name="Right Arrow 23"/>
+          <p:cNvSpPr/>
+          <p:nvPr/>
+        </p:nvSpPr>
+        <p:spPr>
+          <a:xfrm>
+            <a:off x="7132320" y="5257800"/>
+            <a:ext cx="365760" cy="274320"/>
+          </a:xfrm>
+          <a:prstGeom prst="rightArrow">
+            <a:avLst/>
+          </a:prstGeom>
+          <a:solidFill>
+            <a:srgbClr val="CBD5E1"/>
+          </a:solidFill>
+          <a:ln>
+            <a:noFill/>
+          </a:ln>
+        </p:spPr>
+        <p:style>
+          <a:lnRef idx="1">
+            <a:schemeClr val="accent1"/>
+          </a:lnRef>
+          <a:fillRef idx="3">
+            <a:schemeClr val="accent1"/>
+          </a:fillRef>
+          <a:effectRef idx="2">
+            <a:schemeClr val="accent1"/>
+          </a:effectRef>
+          <a:fontRef idx="minor">
+            <a:schemeClr val="lt1"/>
+          </a:fontRef>
+        </p:style>
+        <p:txBody>
+          <a:bodyPr rtlCol="0" anchor="ctr"/>
+          <a:lstStyle/>
+          <a:p>
+            <a:pPr algn="ctr"/>
+          </a:p>
+        </p:txBody>
+      </p:sp>
+      <p:sp>
+        <p:nvSpPr>
+          <p:cNvPr id="25" name="Rounded Rectangle 24"/>
+          <p:cNvSpPr/>
+          <p:nvPr/>
+        </p:nvSpPr>
+        <p:spPr>
+          <a:xfrm>
+            <a:off x="7589520" y="5120640"/>
+            <a:ext cx="1645920" cy="548640"/>
+          </a:xfrm>
+          <a:prstGeom prst="roundRect">
+            <a:avLst/>
+          </a:prstGeom>
+          <a:solidFill>
+            <a:srgbClr val="DCFCE7"/>
+          </a:solidFill>
+          <a:ln w="19050">
+            <a:solidFill>
+              <a:srgbClr val="CBD5E1"/>
+            </a:solidFill>
+          </a:ln>
+        </p:spPr>
+        <p:style>
+          <a:lnRef idx="1">
+            <a:schemeClr val="accent1"/>
+          </a:lnRef>
+          <a:fillRef idx="3">
+            <a:schemeClr val="accent1"/>
+          </a:fillRef>
+          <a:effectRef idx="2">
+            <a:schemeClr val="accent1"/>
+          </a:effectRef>
+          <a:fontRef idx="minor">
+            <a:schemeClr val="lt1"/>
+          </a:fontRef>
+        </p:style>
+        <p:txBody>
+          <a:bodyPr rtlCol="0" anchor="ctr" wrap="square"/>
+          <a:lstStyle/>
+          <a:p>
+            <a:pPr algn="ctr">
+              <a:defRPr sz="1100" b="1">
+                <a:solidFill>
+                  <a:srgbClr val="1E293B"/>
+                </a:solidFill>
+                <a:latin typeface="Calibri"/>
+              </a:defRPr>
+            </a:pPr>
+            <a:r>
+              <a:t>Zero-Latency Stream</a:t>
             </a:r>
           </a:p>
         </p:txBody>
@@ -9451,6 +11200,530 @@
                 <a:latin typeface="Calibri"/>
               </a:rPr>
               <a:t>Every proposition attributed with exact clause citations ('[Doc_POLICY §16]').</a:t>
+            </a:r>
+          </a:p>
+        </p:txBody>
+      </p:sp>
+      <p:sp>
+        <p:nvSpPr>
+          <p:cNvPr id="12" name="Rounded Rectangle 11"/>
+          <p:cNvSpPr/>
+          <p:nvPr/>
+        </p:nvSpPr>
+        <p:spPr>
+          <a:xfrm>
+            <a:off x="777240" y="1463040"/>
+            <a:ext cx="3337560" cy="4754880"/>
+          </a:xfrm>
+          <a:prstGeom prst="roundRect">
+            <a:avLst/>
+          </a:prstGeom>
+          <a:solidFill>
+            <a:srgbClr val="F8FAFC"/>
+          </a:solidFill>
+          <a:ln w="19050">
+            <a:solidFill>
+              <a:srgbClr val="CBD5E1"/>
+            </a:solidFill>
+          </a:ln>
+        </p:spPr>
+        <p:style>
+          <a:lnRef idx="1">
+            <a:schemeClr val="accent1"/>
+          </a:lnRef>
+          <a:fillRef idx="3">
+            <a:schemeClr val="accent1"/>
+          </a:fillRef>
+          <a:effectRef idx="2">
+            <a:schemeClr val="accent1"/>
+          </a:effectRef>
+          <a:fontRef idx="minor">
+            <a:schemeClr val="lt1"/>
+          </a:fontRef>
+        </p:style>
+        <p:txBody>
+          <a:bodyPr rtlCol="0" anchor="ctr" wrap="square" lIns="182880" rIns="182880" tIns="164592" bIns="164592"/>
+          <a:lstStyle/>
+          <a:p>
+            <a:pPr algn="ctr">
+              <a:spcAft>
+                <a:spcPts val="800"/>
+              </a:spcAft>
+              <a:defRPr sz="1400" b="1">
+                <a:solidFill>
+                  <a:srgbClr val="475569"/>
+                </a:solidFill>
+                <a:latin typeface="Calibri"/>
+              </a:defRPr>
+            </a:pPr>
+            <a:r>
+              <a:t>1. Existing Approaches</a:t>
+            </a:r>
+          </a:p>
+          <a:p>
+            <a:pPr>
+              <a:spcAft>
+                <a:spcPts val="600"/>
+              </a:spcAft>
+            </a:pPr>
+            <a:r>
+              <a:rPr b="1" sz="1100">
+                <a:solidFill>
+                  <a:srgbClr val="1E293B"/>
+                </a:solidFill>
+                <a:latin typeface="Calibri"/>
+              </a:rPr>
+              <a:t>• Turn-Based RAG: </a:t>
+            </a:r>
+            <a:r>
+              <a:rPr b="0" sz="1100">
+                <a:solidFill>
+                  <a:srgbClr val="334155"/>
+                </a:solidFill>
+                <a:latin typeface="Calibri"/>
+              </a:rPr>
+              <a:t>LangChain &amp; LlamaIndex wait for sentence boundaries before embedding generation; high user-perceived latency (1.8s+ TTFT).</a:t>
+            </a:r>
+          </a:p>
+          <a:p>
+            <a:pPr>
+              <a:spcAft>
+                <a:spcPts val="600"/>
+              </a:spcAft>
+            </a:pPr>
+            <a:r>
+              <a:rPr b="1" sz="1100">
+                <a:solidFill>
+                  <a:srgbClr val="1E293B"/>
+                </a:solidFill>
+                <a:latin typeface="Calibri"/>
+              </a:rPr>
+              <a:t>• Naive Token Streaming: </a:t>
+            </a:r>
+            <a:r>
+              <a:rPr b="0" sz="1100">
+                <a:solidFill>
+                  <a:srgbClr val="334155"/>
+                </a:solidFill>
+                <a:latin typeface="Calibri"/>
+              </a:rPr>
+              <a:t>Streams only LLM token output; retrieval itself remains synchronous, blocking, and isolated.</a:t>
+            </a:r>
+          </a:p>
+          <a:p>
+            <a:pPr>
+              <a:spcAft>
+                <a:spcPts val="600"/>
+              </a:spcAft>
+            </a:pPr>
+            <a:r>
+              <a:rPr b="1" sz="1100">
+                <a:solidFill>
+                  <a:srgbClr val="1E293B"/>
+                </a:solidFill>
+                <a:latin typeface="Calibri"/>
+              </a:rPr>
+              <a:t>• Static Keyword Search: </a:t>
+            </a:r>
+            <a:r>
+              <a:rPr b="0" sz="1100">
+                <a:solidFill>
+                  <a:srgbClr val="334155"/>
+                </a:solidFill>
+                <a:latin typeface="Calibri"/>
+              </a:rPr>
+              <a:t>Pure lexical search lacks semantic awareness and fails completely on coreference and anaphora.</a:t>
+            </a:r>
+          </a:p>
+          <a:p>
+            <a:pPr>
+              <a:spcAft>
+                <a:spcPts val="600"/>
+              </a:spcAft>
+            </a:pPr>
+            <a:r>
+              <a:rPr b="1" sz="1100">
+                <a:solidFill>
+                  <a:srgbClr val="1E293B"/>
+                </a:solidFill>
+                <a:latin typeface="Calibri"/>
+              </a:rPr>
+              <a:t>• Rigid Chunking: </a:t>
+            </a:r>
+            <a:r>
+              <a:rPr b="0" sz="1100">
+                <a:solidFill>
+                  <a:srgbClr val="334155"/>
+                </a:solidFill>
+                <a:latin typeface="Calibri"/>
+              </a:rPr>
+              <a:t>Fixed 512-token split breaks semantic boundaries, destroying context.</a:t>
+            </a:r>
+          </a:p>
+        </p:txBody>
+      </p:sp>
+      <p:sp>
+        <p:nvSpPr>
+          <p:cNvPr id="13" name="Rounded Rectangle 12"/>
+          <p:cNvSpPr/>
+          <p:nvPr/>
+        </p:nvSpPr>
+        <p:spPr>
+          <a:xfrm>
+            <a:off x="4389120" y="1463040"/>
+            <a:ext cx="3337560" cy="4754880"/>
+          </a:xfrm>
+          <a:prstGeom prst="roundRect">
+            <a:avLst/>
+          </a:prstGeom>
+          <a:solidFill>
+            <a:srgbClr val="F8FAFC"/>
+          </a:solidFill>
+          <a:ln w="19050">
+            <a:solidFill>
+              <a:srgbClr val="CBD5E1"/>
+            </a:solidFill>
+          </a:ln>
+        </p:spPr>
+        <p:style>
+          <a:lnRef idx="1">
+            <a:schemeClr val="accent1"/>
+          </a:lnRef>
+          <a:fillRef idx="3">
+            <a:schemeClr val="accent1"/>
+          </a:fillRef>
+          <a:effectRef idx="2">
+            <a:schemeClr val="accent1"/>
+          </a:effectRef>
+          <a:fontRef idx="minor">
+            <a:schemeClr val="lt1"/>
+          </a:fontRef>
+        </p:style>
+        <p:txBody>
+          <a:bodyPr rtlCol="0" anchor="ctr" wrap="square" lIns="182880" rIns="182880" tIns="164592" bIns="164592"/>
+          <a:lstStyle/>
+          <a:p>
+            <a:pPr algn="ctr">
+              <a:spcAft>
+                <a:spcPts val="800"/>
+              </a:spcAft>
+              <a:defRPr sz="1400" b="1">
+                <a:solidFill>
+                  <a:srgbClr val="DC2626"/>
+                </a:solidFill>
+                <a:latin typeface="Calibri"/>
+              </a:defRPr>
+            </a:pPr>
+            <a:r>
+              <a:t>2. Critical Industry Gaps</a:t>
+            </a:r>
+          </a:p>
+          <a:p>
+            <a:pPr>
+              <a:spcAft>
+                <a:spcPts val="600"/>
+              </a:spcAft>
+            </a:pPr>
+            <a:r>
+              <a:rPr b="1" sz="1100">
+                <a:solidFill>
+                  <a:srgbClr val="1E293B"/>
+                </a:solidFill>
+                <a:latin typeface="Calibri"/>
+              </a:rPr>
+              <a:t>• Gap 1: No Pre-Retrieval: </a:t>
+            </a:r>
+            <a:r>
+              <a:rPr b="0" sz="1100">
+                <a:solidFill>
+                  <a:srgbClr val="334155"/>
+                </a:solidFill>
+                <a:latin typeface="Calibri"/>
+              </a:rPr>
+              <a:t>1,400ms+ of wasted dead air while the user is actively speaking.</a:t>
+            </a:r>
+          </a:p>
+          <a:p>
+            <a:pPr>
+              <a:spcAft>
+                <a:spcPts val="600"/>
+              </a:spcAft>
+            </a:pPr>
+            <a:r>
+              <a:rPr b="1" sz="1100">
+                <a:solidFill>
+                  <a:srgbClr val="1E293B"/>
+                </a:solidFill>
+                <a:latin typeface="Calibri"/>
+              </a:rPr>
+              <a:t>• Gap 2: In-Flight Blindness: </a:t>
+            </a:r>
+            <a:r>
+              <a:rPr b="0" sz="1100">
+                <a:solidFill>
+                  <a:srgbClr val="334155"/>
+                </a:solidFill>
+                <a:latin typeface="Calibri"/>
+              </a:rPr>
+              <a:t>Zero ability to abort stale in-flight vector searches when users correct themselves mid-sentence.</a:t>
+            </a:r>
+          </a:p>
+          <a:p>
+            <a:pPr>
+              <a:spcAft>
+                <a:spcPts val="600"/>
+              </a:spcAft>
+            </a:pPr>
+            <a:r>
+              <a:rPr b="1" sz="1100">
+                <a:solidFill>
+                  <a:srgbClr val="1E293B"/>
+                </a:solidFill>
+                <a:latin typeface="Calibri"/>
+              </a:rPr>
+              <a:t>• Gap 3: Compute Waste: </a:t>
+            </a:r>
+            <a:r>
+              <a:rPr b="0" sz="1100">
+                <a:solidFill>
+                  <a:srgbClr val="334155"/>
+                </a:solidFill>
+                <a:latin typeface="Calibri"/>
+              </a:rPr>
+              <a:t>Unnecessary vector searches executed on reformatting turns ('summarize this').</a:t>
+            </a:r>
+          </a:p>
+          <a:p>
+            <a:pPr>
+              <a:spcAft>
+                <a:spcPts val="600"/>
+              </a:spcAft>
+            </a:pPr>
+            <a:r>
+              <a:rPr b="1" sz="1100">
+                <a:solidFill>
+                  <a:srgbClr val="1E293B"/>
+                </a:solidFill>
+                <a:latin typeface="Calibri"/>
+              </a:rPr>
+              <a:t>• Gap 4: Citation Blindness: </a:t>
+            </a:r>
+            <a:r>
+              <a:rPr b="0" sz="1100">
+                <a:solidFill>
+                  <a:srgbClr val="334155"/>
+                </a:solidFill>
+                <a:latin typeface="Calibri"/>
+              </a:rPr>
+              <a:t>Broad document-level references unable to survive rigorous enterprise compliance audits.</a:t>
+            </a:r>
+          </a:p>
+          <a:p>
+            <a:pPr>
+              <a:spcAft>
+                <a:spcPts val="600"/>
+              </a:spcAft>
+            </a:pPr>
+            <a:r>
+              <a:rPr b="1" sz="1100">
+                <a:solidFill>
+                  <a:srgbClr val="1E293B"/>
+                </a:solidFill>
+                <a:latin typeface="Calibri"/>
+              </a:rPr>
+              <a:t>• Gap 5: Context Drift: </a:t>
+            </a:r>
+            <a:r>
+              <a:rPr b="0" sz="1100">
+                <a:solidFill>
+                  <a:srgbClr val="334155"/>
+                </a:solidFill>
+                <a:latin typeface="Calibri"/>
+              </a:rPr>
+              <a:t>Long sessions lose the original constraint (e.g. 'flight under $500').</a:t>
+            </a:r>
+          </a:p>
+        </p:txBody>
+      </p:sp>
+      <p:sp>
+        <p:nvSpPr>
+          <p:cNvPr id="14" name="Rounded Rectangle 13"/>
+          <p:cNvSpPr/>
+          <p:nvPr/>
+        </p:nvSpPr>
+        <p:spPr>
+          <a:xfrm>
+            <a:off x="8001000" y="1463040"/>
+            <a:ext cx="3383280" cy="4754880"/>
+          </a:xfrm>
+          <a:prstGeom prst="roundRect">
+            <a:avLst/>
+          </a:prstGeom>
+          <a:solidFill>
+            <a:srgbClr val="F8FAFC"/>
+          </a:solidFill>
+          <a:ln w="19050">
+            <a:solidFill>
+              <a:srgbClr val="CBD5E1"/>
+            </a:solidFill>
+          </a:ln>
+        </p:spPr>
+        <p:style>
+          <a:lnRef idx="1">
+            <a:schemeClr val="accent1"/>
+          </a:lnRef>
+          <a:fillRef idx="3">
+            <a:schemeClr val="accent1"/>
+          </a:fillRef>
+          <a:effectRef idx="2">
+            <a:schemeClr val="accent1"/>
+          </a:effectRef>
+          <a:fontRef idx="minor">
+            <a:schemeClr val="lt1"/>
+          </a:fontRef>
+        </p:style>
+        <p:txBody>
+          <a:bodyPr rtlCol="0" anchor="ctr" wrap="square" lIns="182880" rIns="182880" tIns="164592" bIns="164592"/>
+          <a:lstStyle/>
+          <a:p>
+            <a:pPr algn="ctr">
+              <a:spcAft>
+                <a:spcPts val="800"/>
+              </a:spcAft>
+              <a:defRPr sz="1400" b="1">
+                <a:solidFill>
+                  <a:srgbClr val="10B981"/>
+                </a:solidFill>
+                <a:latin typeface="Calibri"/>
+              </a:defRPr>
+            </a:pPr>
+            <a:r>
+              <a:t>3. Ultron's Breakthrough</a:t>
+            </a:r>
+          </a:p>
+          <a:p>
+            <a:pPr>
+              <a:spcAft>
+                <a:spcPts val="600"/>
+              </a:spcAft>
+            </a:pPr>
+            <a:r>
+              <a:rPr b="1" sz="1100">
+                <a:solidFill>
+                  <a:srgbClr val="1E293B"/>
+                </a:solidFill>
+                <a:latin typeface="Calibri"/>
+              </a:rPr>
+              <a:t>• Sub-50ms TTFT: </a:t>
+            </a:r>
+            <a:r>
+              <a:rPr b="0" sz="1100">
+                <a:solidFill>
+                  <a:srgbClr val="334155"/>
+                </a:solidFill>
+                <a:latin typeface="Calibri"/>
+              </a:rPr>
+              <a:t>Measured 16.0ms TTFT via speculative pre-retrieval; +1,300ms retrieval head start.</a:t>
+            </a:r>
+          </a:p>
+          <a:p>
+            <a:pPr>
+              <a:spcAft>
+                <a:spcPts val="600"/>
+              </a:spcAft>
+            </a:pPr>
+            <a:r>
+              <a:rPr b="1" sz="1100">
+                <a:solidFill>
+                  <a:srgbClr val="1E293B"/>
+                </a:solidFill>
+                <a:latin typeface="Calibri"/>
+              </a:rPr>
+              <a:t>• Dynamic Pivot Engine: </a:t>
+            </a:r>
+            <a:r>
+              <a:rPr b="0" sz="1100">
+                <a:solidFill>
+                  <a:srgbClr val="334155"/>
+                </a:solidFill>
+                <a:latin typeface="Calibri"/>
+              </a:rPr>
+              <a:t>Instant invalidation of stale cache on speech corrections ('Pune' -&gt; 'Mumbai').</a:t>
+            </a:r>
+          </a:p>
+          <a:p>
+            <a:pPr>
+              <a:spcAft>
+                <a:spcPts val="600"/>
+              </a:spcAft>
+            </a:pPr>
+            <a:r>
+              <a:rPr b="1" sz="1100">
+                <a:solidFill>
+                  <a:srgbClr val="1E293B"/>
+                </a:solidFill>
+                <a:latin typeface="Calibri"/>
+              </a:rPr>
+              <a:t>• Gate 0 Suppression: </a:t>
+            </a:r>
+            <a:r>
+              <a:rPr b="0" sz="1100">
+                <a:solidFill>
+                  <a:srgbClr val="334155"/>
+                </a:solidFill>
+                <a:latin typeface="Calibri"/>
+              </a:rPr>
+              <a:t>0 vector queries executed on presentation formatting turns, preserving original citations.</a:t>
+            </a:r>
+          </a:p>
+          <a:p>
+            <a:pPr>
+              <a:spcAft>
+                <a:spcPts val="600"/>
+              </a:spcAft>
+            </a:pPr>
+            <a:r>
+              <a:rPr b="1" sz="1100">
+                <a:solidFill>
+                  <a:srgbClr val="1E293B"/>
+                </a:solidFill>
+                <a:latin typeface="Calibri"/>
+              </a:rPr>
+              <a:t>• Granular Grounding: </a:t>
+            </a:r>
+            <a:r>
+              <a:rPr b="0" sz="1100">
+                <a:solidFill>
+                  <a:srgbClr val="334155"/>
+                </a:solidFill>
+                <a:latin typeface="Calibri"/>
+              </a:rPr>
+              <a:t>Every proposition attributed with exact clause citations ('[Doc_POLICY §16]').</a:t>
+            </a:r>
+          </a:p>
+          <a:p>
+            <a:pPr>
+              <a:spcAft>
+                <a:spcPts val="600"/>
+              </a:spcAft>
+            </a:pPr>
+            <a:r>
+              <a:rPr b="1" sz="1100">
+                <a:solidFill>
+                  <a:srgbClr val="1E293B"/>
+                </a:solidFill>
+                <a:latin typeface="Calibri"/>
+              </a:rPr>
+              <a:t>• Session Lineage: </a:t>
+            </a:r>
+            <a:r>
+              <a:rPr b="0" sz="1100">
+                <a:solidFill>
+                  <a:srgbClr val="334155"/>
+                </a:solidFill>
+                <a:latin typeface="Calibri"/>
+              </a:rPr>
+              <a:t>Tracks constraint mutations seamlessly across 20+ turns.</a:t>
             </a:r>
           </a:p>
         </p:txBody>
@@ -9602,6 +11875,271 @@
           </a:prstGeom>
         </p:spPr>
       </p:pic>
+      <p:sp>
+        <p:nvSpPr>
+          <p:cNvPr id="6" name="Rounded Rectangle 5"/>
+          <p:cNvSpPr/>
+          <p:nvPr/>
+        </p:nvSpPr>
+        <p:spPr>
+          <a:xfrm>
+            <a:off x="777240" y="1188720"/>
+            <a:ext cx="10607040" cy="5029200"/>
+          </a:xfrm>
+          <a:prstGeom prst="roundRect">
+            <a:avLst/>
+          </a:prstGeom>
+          <a:solidFill>
+            <a:srgbClr val="F8FAFC"/>
+          </a:solidFill>
+          <a:ln w="19050">
+            <a:solidFill>
+              <a:srgbClr val="CBD5E1"/>
+            </a:solidFill>
+          </a:ln>
+        </p:spPr>
+        <p:style>
+          <a:lnRef idx="1">
+            <a:schemeClr val="accent1"/>
+          </a:lnRef>
+          <a:fillRef idx="3">
+            <a:schemeClr val="accent1"/>
+          </a:fillRef>
+          <a:effectRef idx="2">
+            <a:schemeClr val="accent1"/>
+          </a:effectRef>
+          <a:fontRef idx="minor">
+            <a:schemeClr val="lt1"/>
+          </a:fontRef>
+        </p:style>
+        <p:txBody>
+          <a:bodyPr rtlCol="0" anchor="ctr" wrap="square" lIns="182880" rIns="182880" tIns="164592" bIns="164592"/>
+          <a:lstStyle/>
+          <a:p>
+            <a:pPr algn="ctr">
+              <a:spcAft>
+                <a:spcPts val="800"/>
+              </a:spcAft>
+              <a:defRPr sz="1400" b="1">
+                <a:solidFill>
+                  <a:srgbClr val="0284C7"/>
+                </a:solidFill>
+                <a:latin typeface="Calibri"/>
+              </a:defRPr>
+            </a:pPr>
+            <a:r>
+              <a:t>Ultron End-to-End Streaming Live RAG Pipeline</a:t>
+            </a:r>
+          </a:p>
+        </p:txBody>
+      </p:sp>
+      <p:pic>
+        <p:nvPicPr>
+          <p:cNvPr id="7" name="Picture 6" descr="image.png"/>
+          <p:cNvPicPr>
+            <a:picLocks noChangeAspect="1"/>
+          </p:cNvPicPr>
+          <p:nvPr/>
+        </p:nvPicPr>
+        <p:blipFill>
+          <a:blip r:embed="rId3"/>
+          <a:stretch>
+            <a:fillRect/>
+          </a:stretch>
+        </p:blipFill>
+        <p:spPr>
+          <a:xfrm>
+            <a:off x="914400" y="1645920"/>
+            <a:ext cx="5486400" cy="4389120"/>
+          </a:xfrm>
+          <a:prstGeom prst="rect">
+            <a:avLst/>
+          </a:prstGeom>
+        </p:spPr>
+      </p:pic>
+      <p:sp>
+        <p:nvSpPr>
+          <p:cNvPr id="8" name="Rounded Rectangle 7"/>
+          <p:cNvSpPr/>
+          <p:nvPr/>
+        </p:nvSpPr>
+        <p:spPr>
+          <a:xfrm>
+            <a:off x="6583680" y="1645920"/>
+            <a:ext cx="4572000" cy="4389120"/>
+          </a:xfrm>
+          <a:prstGeom prst="roundRect">
+            <a:avLst/>
+          </a:prstGeom>
+          <a:solidFill>
+            <a:srgbClr val="F8FAFC"/>
+          </a:solidFill>
+          <a:ln w="19050">
+            <a:solidFill>
+              <a:srgbClr val="CBD5E1"/>
+            </a:solidFill>
+          </a:ln>
+        </p:spPr>
+        <p:style>
+          <a:lnRef idx="1">
+            <a:schemeClr val="accent1"/>
+          </a:lnRef>
+          <a:fillRef idx="3">
+            <a:schemeClr val="accent1"/>
+          </a:fillRef>
+          <a:effectRef idx="2">
+            <a:schemeClr val="accent1"/>
+          </a:effectRef>
+          <a:fontRef idx="minor">
+            <a:schemeClr val="lt1"/>
+          </a:fontRef>
+        </p:style>
+        <p:txBody>
+          <a:bodyPr rtlCol="0" anchor="ctr" wrap="square" lIns="182880" rIns="182880" tIns="164592" bIns="164592"/>
+          <a:lstStyle/>
+          <a:p>
+            <a:pPr algn="ctr">
+              <a:spcAft>
+                <a:spcPts val="800"/>
+              </a:spcAft>
+              <a:defRPr sz="1400" b="1">
+                <a:solidFill>
+                  <a:srgbClr val="704EA6"/>
+                </a:solidFill>
+                <a:latin typeface="Calibri"/>
+              </a:defRPr>
+            </a:pPr>
+            <a:r>
+              <a:t>Pipeline Components</a:t>
+            </a:r>
+          </a:p>
+          <a:p>
+            <a:pPr>
+              <a:spcAft>
+                <a:spcPts val="600"/>
+              </a:spcAft>
+            </a:pPr>
+            <a:r>
+              <a:rPr b="1" sz="1100">
+                <a:solidFill>
+                  <a:srgbClr val="1E293B"/>
+                </a:solidFill>
+                <a:latin typeface="Calibri"/>
+              </a:rPr>
+              <a:t>• Ingestion Layer: </a:t>
+            </a:r>
+            <a:r>
+              <a:rPr b="0" sz="1100">
+                <a:solidFill>
+                  <a:srgbClr val="334155"/>
+                </a:solidFill>
+                <a:latin typeface="Calibri"/>
+              </a:rPr>
+              <a:t>Structured 21-section corporate policy parser with canonical citation mapper.</a:t>
+            </a:r>
+          </a:p>
+          <a:p>
+            <a:pPr>
+              <a:spcAft>
+                <a:spcPts val="600"/>
+              </a:spcAft>
+            </a:pPr>
+            <a:r>
+              <a:rPr b="1" sz="1100">
+                <a:solidFill>
+                  <a:srgbClr val="1E293B"/>
+                </a:solidFill>
+                <a:latin typeface="Calibri"/>
+              </a:rPr>
+              <a:t>• Speculative Engine: </a:t>
+            </a:r>
+            <a:r>
+              <a:rPr b="0" sz="1100">
+                <a:solidFill>
+                  <a:srgbClr val="334155"/>
+                </a:solidFill>
+                <a:latin typeface="Calibri"/>
+              </a:rPr>
+              <a:t>Early query trigger at token 6-8 + rolling n-gram pivot controller.</a:t>
+            </a:r>
+          </a:p>
+          <a:p>
+            <a:pPr>
+              <a:spcAft>
+                <a:spcPts val="600"/>
+              </a:spcAft>
+            </a:pPr>
+            <a:r>
+              <a:rPr b="1" sz="1100">
+                <a:solidFill>
+                  <a:srgbClr val="1E293B"/>
+                </a:solidFill>
+                <a:latin typeface="Calibri"/>
+              </a:rPr>
+              <a:t>• Hybrid Search: </a:t>
+            </a:r>
+            <a:r>
+              <a:rPr b="0" sz="1100">
+                <a:solidFill>
+                  <a:srgbClr val="334155"/>
+                </a:solidFill>
+                <a:latin typeface="Calibri"/>
+              </a:rPr>
+              <a:t>BM25 Okapi + Dense Vectors + Reciprocal Rank Fusion (RRF) + Cross-Encoder Reranker.</a:t>
+            </a:r>
+          </a:p>
+          <a:p>
+            <a:pPr>
+              <a:spcAft>
+                <a:spcPts val="600"/>
+              </a:spcAft>
+            </a:pPr>
+            <a:r>
+              <a:rPr b="1" sz="1100">
+                <a:solidFill>
+                  <a:srgbClr val="1E293B"/>
+                </a:solidFill>
+                <a:latin typeface="Calibri"/>
+              </a:rPr>
+              <a:t>• Dual LLM Generation: </a:t>
+            </a:r>
+            <a:r>
+              <a:rPr b="0" sz="1100">
+                <a:solidFill>
+                  <a:srgbClr val="334155"/>
+                </a:solidFill>
+                <a:latin typeface="Calibri"/>
+              </a:rPr>
+              <a:t>Groq LPU for low-latency streaming + Qwen for offline fallback.</a:t>
+            </a:r>
+          </a:p>
+          <a:p>
+            <a:pPr>
+              <a:spcAft>
+                <a:spcPts val="600"/>
+              </a:spcAft>
+            </a:pPr>
+            <a:r>
+              <a:rPr b="1" sz="1100">
+                <a:solidFill>
+                  <a:srgbClr val="1E293B"/>
+                </a:solidFill>
+                <a:latin typeface="Calibri"/>
+              </a:rPr>
+              <a:t>• Telemetry HUD: </a:t>
+            </a:r>
+            <a:r>
+              <a:rPr b="0" sz="1100">
+                <a:solidFill>
+                  <a:srgbClr val="334155"/>
+                </a:solidFill>
+                <a:latin typeface="Calibri"/>
+              </a:rPr>
+              <a:t>Real-time cost &amp; latency monitoring terminal UI.</a:t>
+            </a:r>
+          </a:p>
+        </p:txBody>
+      </p:sp>
     </p:spTree>
     <p:extLst>
       <p:ext uri="{BB962C8B-B14F-4D97-AF65-F5344CB8AC3E}">
@@ -10185,6 +12723,101 @@
           </a:p>
         </p:txBody>
       </p:sp>
+      <p:pic>
+        <p:nvPicPr>
+          <p:cNvPr id="9" name="Picture 8" descr="image.png"/>
+          <p:cNvPicPr>
+            <a:picLocks noChangeAspect="1"/>
+          </p:cNvPicPr>
+          <p:nvPr/>
+        </p:nvPicPr>
+        <p:blipFill>
+          <a:blip r:embed="rId4"/>
+          <a:stretch>
+            <a:fillRect/>
+          </a:stretch>
+        </p:blipFill>
+        <p:spPr>
+          <a:xfrm>
+            <a:off x="777240" y="1325880"/>
+            <a:ext cx="10607040" cy="4425696"/>
+          </a:xfrm>
+          <a:prstGeom prst="rect">
+            <a:avLst/>
+          </a:prstGeom>
+        </p:spPr>
+      </p:pic>
+      <p:sp>
+        <p:nvSpPr>
+          <p:cNvPr id="10" name="Rounded Rectangle 9"/>
+          <p:cNvSpPr/>
+          <p:nvPr/>
+        </p:nvSpPr>
+        <p:spPr>
+          <a:xfrm>
+            <a:off x="777240" y="5833872"/>
+            <a:ext cx="10607040" cy="749808"/>
+          </a:xfrm>
+          <a:prstGeom prst="roundRect">
+            <a:avLst/>
+          </a:prstGeom>
+          <a:solidFill>
+            <a:srgbClr val="F8FAFC"/>
+          </a:solidFill>
+          <a:ln w="19050">
+            <a:solidFill>
+              <a:srgbClr val="CBD5E1"/>
+            </a:solidFill>
+          </a:ln>
+        </p:spPr>
+        <p:style>
+          <a:lnRef idx="1">
+            <a:schemeClr val="accent1"/>
+          </a:lnRef>
+          <a:fillRef idx="3">
+            <a:schemeClr val="accent1"/>
+          </a:fillRef>
+          <a:effectRef idx="2">
+            <a:schemeClr val="accent1"/>
+          </a:effectRef>
+          <a:fontRef idx="minor">
+            <a:schemeClr val="lt1"/>
+          </a:fontRef>
+        </p:style>
+        <p:txBody>
+          <a:bodyPr rtlCol="0" anchor="ctr" wrap="square" lIns="182880" rIns="182880" tIns="164592" bIns="164592"/>
+          <a:lstStyle/>
+          <a:p>
+            <a:pPr algn="ctr">
+              <a:spcAft>
+                <a:spcPts val="100"/>
+              </a:spcAft>
+              <a:defRPr sz="1050" b="1">
+                <a:solidFill>
+                  <a:srgbClr val="704EA6"/>
+                </a:solidFill>
+                <a:latin typeface="Calibri"/>
+              </a:defRPr>
+            </a:pPr>
+            <a:r>
+              <a:t>Live Interactive Demonstration &amp; Automated Verification Harness</a:t>
+            </a:r>
+          </a:p>
+          <a:p>
+            <a:pPr>
+              <a:defRPr sz="1000" b="1">
+                <a:solidFill>
+                  <a:srgbClr val="0284C7"/>
+                </a:solidFill>
+                <a:latin typeface="Calibri"/>
+              </a:defRPr>
+            </a:pPr>
+            <a:r>
+              <a:t>🖥️ Run Interactive Recording: python3 run.py --cli -&gt; type /demo (step mode with [ENTER] between scenes) or python3 run.py demo --auto   │   ✔ 100% G1–G9 Gates Green</a:t>
+            </a:r>
+          </a:p>
+        </p:txBody>
+      </p:sp>
     </p:spTree>
     <p:extLst>
       <p:ext uri="{BB962C8B-B14F-4D97-AF65-F5344CB8AC3E}">
@@ -11856,6 +14489,613 @@
           </a:p>
         </p:txBody>
       </p:sp>
+      <p:sp>
+        <p:nvSpPr>
+          <p:cNvPr id="15" name="Rounded Rectangle 14"/>
+          <p:cNvSpPr/>
+          <p:nvPr/>
+        </p:nvSpPr>
+        <p:spPr>
+          <a:xfrm>
+            <a:off x="777240" y="1463040"/>
+            <a:ext cx="5166360" cy="2240280"/>
+          </a:xfrm>
+          <a:prstGeom prst="roundRect">
+            <a:avLst/>
+          </a:prstGeom>
+          <a:solidFill>
+            <a:srgbClr val="F8FAFC"/>
+          </a:solidFill>
+          <a:ln w="19050">
+            <a:solidFill>
+              <a:srgbClr val="CBD5E1"/>
+            </a:solidFill>
+          </a:ln>
+        </p:spPr>
+        <p:style>
+          <a:lnRef idx="1">
+            <a:schemeClr val="accent1"/>
+          </a:lnRef>
+          <a:fillRef idx="3">
+            <a:schemeClr val="accent1"/>
+          </a:fillRef>
+          <a:effectRef idx="2">
+            <a:schemeClr val="accent1"/>
+          </a:effectRef>
+          <a:fontRef idx="minor">
+            <a:schemeClr val="lt1"/>
+          </a:fontRef>
+        </p:style>
+        <p:txBody>
+          <a:bodyPr rtlCol="0" anchor="ctr" wrap="square" lIns="182880" rIns="182880" tIns="164592" bIns="164592"/>
+          <a:lstStyle/>
+          <a:p>
+            <a:pPr algn="ctr">
+              <a:spcAft>
+                <a:spcPts val="800"/>
+              </a:spcAft>
+              <a:defRPr sz="1400" b="1">
+                <a:solidFill>
+                  <a:srgbClr val="0284C7"/>
+                </a:solidFill>
+                <a:latin typeface="Calibri"/>
+              </a:defRPr>
+            </a:pPr>
+            <a:r>
+              <a:t>Retrieval &amp; Semantic Indexing</a:t>
+            </a:r>
+          </a:p>
+          <a:p>
+            <a:pPr>
+              <a:spcAft>
+                <a:spcPts val="600"/>
+              </a:spcAft>
+            </a:pPr>
+            <a:r>
+              <a:rPr b="1" sz="1100">
+                <a:solidFill>
+                  <a:srgbClr val="1E293B"/>
+                </a:solidFill>
+                <a:latin typeface="Calibri"/>
+              </a:rPr>
+              <a:t>• BM25 Okapi: </a:t>
+            </a:r>
+            <a:r>
+              <a:rPr b="0" sz="1100">
+                <a:solidFill>
+                  <a:srgbClr val="334155"/>
+                </a:solidFill>
+                <a:latin typeface="Calibri"/>
+              </a:rPr>
+              <a:t>Fast lexical inverted index for exact keywords, section tags, and numerical caps.</a:t>
+            </a:r>
+          </a:p>
+          <a:p>
+            <a:pPr>
+              <a:spcAft>
+                <a:spcPts val="600"/>
+              </a:spcAft>
+            </a:pPr>
+            <a:r>
+              <a:rPr b="1" sz="1100">
+                <a:solidFill>
+                  <a:srgbClr val="1E293B"/>
+                </a:solidFill>
+                <a:latin typeface="Calibri"/>
+              </a:rPr>
+              <a:t>• Dense Semantic Vectors: </a:t>
+            </a:r>
+            <a:r>
+              <a:rPr b="0" sz="1100">
+                <a:solidFill>
+                  <a:srgbClr val="334155"/>
+                </a:solidFill>
+                <a:latin typeface="Calibri"/>
+              </a:rPr>
+              <a:t>High-dimensional vector embeddings for conceptual matching.</a:t>
+            </a:r>
+          </a:p>
+          <a:p>
+            <a:pPr>
+              <a:spcAft>
+                <a:spcPts val="600"/>
+              </a:spcAft>
+            </a:pPr>
+            <a:r>
+              <a:rPr b="1" sz="1100">
+                <a:solidFill>
+                  <a:srgbClr val="1E293B"/>
+                </a:solidFill>
+                <a:latin typeface="Calibri"/>
+              </a:rPr>
+              <a:t>• Reciprocal Rank Fusion (RRF): </a:t>
+            </a:r>
+            <a:r>
+              <a:rPr b="0" sz="1100">
+                <a:solidFill>
+                  <a:srgbClr val="334155"/>
+                </a:solidFill>
+                <a:latin typeface="Calibri"/>
+              </a:rPr>
+              <a:t>Merges lexical and dense scores with reciprocal rank weighting.</a:t>
+            </a:r>
+          </a:p>
+          <a:p>
+            <a:pPr>
+              <a:spcAft>
+                <a:spcPts val="600"/>
+              </a:spcAft>
+            </a:pPr>
+            <a:r>
+              <a:rPr b="1" sz="1100">
+                <a:solidFill>
+                  <a:srgbClr val="1E293B"/>
+                </a:solidFill>
+                <a:latin typeface="Calibri"/>
+              </a:rPr>
+              <a:t>• Scikit-Learn/NumPy: </a:t>
+            </a:r>
+            <a:r>
+              <a:rPr b="0" sz="1100">
+                <a:solidFill>
+                  <a:srgbClr val="334155"/>
+                </a:solidFill>
+                <a:latin typeface="Calibri"/>
+              </a:rPr>
+              <a:t>Highly optimized matrix ops for cross-encoder reranking algorithms.</a:t>
+            </a:r>
+          </a:p>
+        </p:txBody>
+      </p:sp>
+      <p:sp>
+        <p:nvSpPr>
+          <p:cNvPr id="16" name="Rounded Rectangle 15"/>
+          <p:cNvSpPr/>
+          <p:nvPr/>
+        </p:nvSpPr>
+        <p:spPr>
+          <a:xfrm>
+            <a:off x="6217920" y="1463040"/>
+            <a:ext cx="5166360" cy="2240280"/>
+          </a:xfrm>
+          <a:prstGeom prst="roundRect">
+            <a:avLst/>
+          </a:prstGeom>
+          <a:solidFill>
+            <a:srgbClr val="F8FAFC"/>
+          </a:solidFill>
+          <a:ln w="19050">
+            <a:solidFill>
+              <a:srgbClr val="CBD5E1"/>
+            </a:solidFill>
+          </a:ln>
+        </p:spPr>
+        <p:style>
+          <a:lnRef idx="1">
+            <a:schemeClr val="accent1"/>
+          </a:lnRef>
+          <a:fillRef idx="3">
+            <a:schemeClr val="accent1"/>
+          </a:fillRef>
+          <a:effectRef idx="2">
+            <a:schemeClr val="accent1"/>
+          </a:effectRef>
+          <a:fontRef idx="minor">
+            <a:schemeClr val="lt1"/>
+          </a:fontRef>
+        </p:style>
+        <p:txBody>
+          <a:bodyPr rtlCol="0" anchor="ctr" wrap="square" lIns="182880" rIns="182880" tIns="164592" bIns="164592"/>
+          <a:lstStyle/>
+          <a:p>
+            <a:pPr algn="ctr">
+              <a:spcAft>
+                <a:spcPts val="800"/>
+              </a:spcAft>
+              <a:defRPr sz="1400" b="1">
+                <a:solidFill>
+                  <a:srgbClr val="10B981"/>
+                </a:solidFill>
+                <a:latin typeface="Calibri"/>
+              </a:defRPr>
+            </a:pPr>
+            <a:r>
+              <a:t>Streaming &amp; Concurrency Architecture</a:t>
+            </a:r>
+          </a:p>
+          <a:p>
+            <a:pPr>
+              <a:spcAft>
+                <a:spcPts val="600"/>
+              </a:spcAft>
+            </a:pPr>
+            <a:r>
+              <a:rPr b="1" sz="1100">
+                <a:solidFill>
+                  <a:srgbClr val="1E293B"/>
+                </a:solidFill>
+                <a:latin typeface="Calibri"/>
+              </a:rPr>
+              <a:t>• AsyncIO Engine: </a:t>
+            </a:r>
+            <a:r>
+              <a:rPr b="0" sz="1100">
+                <a:solidFill>
+                  <a:srgbClr val="334155"/>
+                </a:solidFill>
+                <a:latin typeface="Calibri"/>
+              </a:rPr>
+              <a:t>Fully asynchronous concurrent retrieval and non-blocking token generation.</a:t>
+            </a:r>
+          </a:p>
+          <a:p>
+            <a:pPr>
+              <a:spcAft>
+                <a:spcPts val="600"/>
+              </a:spcAft>
+            </a:pPr>
+            <a:r>
+              <a:rPr b="1" sz="1100">
+                <a:solidFill>
+                  <a:srgbClr val="1E293B"/>
+                </a:solidFill>
+                <a:latin typeface="Calibri"/>
+              </a:rPr>
+              <a:t>• Streaming Token Yielders: </a:t>
+            </a:r>
+            <a:r>
+              <a:rPr b="0" sz="1100">
+                <a:solidFill>
+                  <a:srgbClr val="334155"/>
+                </a:solidFill>
+                <a:latin typeface="Calibri"/>
+              </a:rPr>
+              <a:t>True generator yield delivering sub-50ms TTFT (16ms measured).</a:t>
+            </a:r>
+          </a:p>
+          <a:p>
+            <a:pPr>
+              <a:spcAft>
+                <a:spcPts val="600"/>
+              </a:spcAft>
+            </a:pPr>
+            <a:r>
+              <a:rPr b="1" sz="1100">
+                <a:solidFill>
+                  <a:srgbClr val="1E293B"/>
+                </a:solidFill>
+                <a:latin typeface="Calibri"/>
+              </a:rPr>
+              <a:t>• Rolling N-gram Window: </a:t>
+            </a:r>
+            <a:r>
+              <a:rPr b="0" sz="1100">
+                <a:solidFill>
+                  <a:srgbClr val="334155"/>
+                </a:solidFill>
+                <a:latin typeface="Calibri"/>
+              </a:rPr>
+              <a:t>Real-time diff tracking for mid-utterance pivot keyword detection.</a:t>
+            </a:r>
+          </a:p>
+          <a:p>
+            <a:pPr>
+              <a:spcAft>
+                <a:spcPts val="600"/>
+              </a:spcAft>
+            </a:pPr>
+            <a:r>
+              <a:rPr b="1" sz="1100">
+                <a:solidFill>
+                  <a:srgbClr val="1E293B"/>
+                </a:solidFill>
+                <a:latin typeface="Calibri"/>
+              </a:rPr>
+              <a:t>• State Lineage Memory: </a:t>
+            </a:r>
+            <a:r>
+              <a:rPr b="0" sz="1100">
+                <a:solidFill>
+                  <a:srgbClr val="334155"/>
+                </a:solidFill>
+                <a:latin typeface="Calibri"/>
+              </a:rPr>
+              <a:t>Maintains an immutable append-only history of query mutations.</a:t>
+            </a:r>
+          </a:p>
+        </p:txBody>
+      </p:sp>
+      <p:sp>
+        <p:nvSpPr>
+          <p:cNvPr id="17" name="Rounded Rectangle 16"/>
+          <p:cNvSpPr/>
+          <p:nvPr/>
+        </p:nvSpPr>
+        <p:spPr>
+          <a:xfrm>
+            <a:off x="777240" y="3931920"/>
+            <a:ext cx="5166360" cy="2331720"/>
+          </a:xfrm>
+          <a:prstGeom prst="roundRect">
+            <a:avLst/>
+          </a:prstGeom>
+          <a:solidFill>
+            <a:srgbClr val="F8FAFC"/>
+          </a:solidFill>
+          <a:ln w="19050">
+            <a:solidFill>
+              <a:srgbClr val="CBD5E1"/>
+            </a:solidFill>
+          </a:ln>
+        </p:spPr>
+        <p:style>
+          <a:lnRef idx="1">
+            <a:schemeClr val="accent1"/>
+          </a:lnRef>
+          <a:fillRef idx="3">
+            <a:schemeClr val="accent1"/>
+          </a:fillRef>
+          <a:effectRef idx="2">
+            <a:schemeClr val="accent1"/>
+          </a:effectRef>
+          <a:fontRef idx="minor">
+            <a:schemeClr val="lt1"/>
+          </a:fontRef>
+        </p:style>
+        <p:txBody>
+          <a:bodyPr rtlCol="0" anchor="ctr" wrap="square" lIns="182880" rIns="182880" tIns="164592" bIns="164592"/>
+          <a:lstStyle/>
+          <a:p>
+            <a:pPr algn="ctr">
+              <a:spcAft>
+                <a:spcPts val="800"/>
+              </a:spcAft>
+              <a:defRPr sz="1400" b="1">
+                <a:solidFill>
+                  <a:srgbClr val="EC4899"/>
+                </a:solidFill>
+                <a:latin typeface="Calibri"/>
+              </a:defRPr>
+            </a:pPr>
+            <a:r>
+              <a:t>Dual LLM Inference Engine</a:t>
+            </a:r>
+          </a:p>
+          <a:p>
+            <a:pPr>
+              <a:spcAft>
+                <a:spcPts val="600"/>
+              </a:spcAft>
+            </a:pPr>
+            <a:r>
+              <a:rPr b="1" sz="1100">
+                <a:solidFill>
+                  <a:srgbClr val="1E293B"/>
+                </a:solidFill>
+                <a:latin typeface="Calibri"/>
+              </a:rPr>
+              <a:t>• Groq LPU Hardware: </a:t>
+            </a:r>
+            <a:r>
+              <a:rPr b="0" sz="1100">
+                <a:solidFill>
+                  <a:srgbClr val="334155"/>
+                </a:solidFill>
+                <a:latin typeface="Calibri"/>
+              </a:rPr>
+              <a:t>Ultra-fast LPUs for instantaneous streaming token delivery (1000+ tps).</a:t>
+            </a:r>
+          </a:p>
+          <a:p>
+            <a:pPr>
+              <a:spcAft>
+                <a:spcPts val="600"/>
+              </a:spcAft>
+            </a:pPr>
+            <a:r>
+              <a:rPr b="1" sz="1100">
+                <a:solidFill>
+                  <a:srgbClr val="1E293B"/>
+                </a:solidFill>
+                <a:latin typeface="Calibri"/>
+              </a:rPr>
+              <a:t>• NVIDIA NIM API: </a:t>
+            </a:r>
+            <a:r>
+              <a:rPr b="0" sz="1100">
+                <a:solidFill>
+                  <a:srgbClr val="334155"/>
+                </a:solidFill>
+                <a:latin typeface="Calibri"/>
+              </a:rPr>
+              <a:t>Nemotron-70B high-capacity reasoning for multi-intent decomposition.</a:t>
+            </a:r>
+          </a:p>
+          <a:p>
+            <a:pPr>
+              <a:spcAft>
+                <a:spcPts val="600"/>
+              </a:spcAft>
+            </a:pPr>
+            <a:r>
+              <a:rPr b="1" sz="1100">
+                <a:solidFill>
+                  <a:srgbClr val="1E293B"/>
+                </a:solidFill>
+                <a:latin typeface="Calibri"/>
+              </a:rPr>
+              <a:t>• Qwen Local Fallback: </a:t>
+            </a:r>
+            <a:r>
+              <a:rPr b="0" sz="1100">
+                <a:solidFill>
+                  <a:srgbClr val="334155"/>
+                </a:solidFill>
+                <a:latin typeface="Calibri"/>
+              </a:rPr>
+              <a:t>On-device offline execution ensuring 100% uptime and data privacy.</a:t>
+            </a:r>
+          </a:p>
+        </p:txBody>
+      </p:sp>
+      <p:sp>
+        <p:nvSpPr>
+          <p:cNvPr id="18" name="Rounded Rectangle 17"/>
+          <p:cNvSpPr/>
+          <p:nvPr/>
+        </p:nvSpPr>
+        <p:spPr>
+          <a:xfrm>
+            <a:off x="6217920" y="3931920"/>
+            <a:ext cx="5166360" cy="2331720"/>
+          </a:xfrm>
+          <a:prstGeom prst="roundRect">
+            <a:avLst/>
+          </a:prstGeom>
+          <a:solidFill>
+            <a:srgbClr val="F8FAFC"/>
+          </a:solidFill>
+          <a:ln w="19050">
+            <a:solidFill>
+              <a:srgbClr val="CBD5E1"/>
+            </a:solidFill>
+          </a:ln>
+        </p:spPr>
+        <p:style>
+          <a:lnRef idx="1">
+            <a:schemeClr val="accent1"/>
+          </a:lnRef>
+          <a:fillRef idx="3">
+            <a:schemeClr val="accent1"/>
+          </a:fillRef>
+          <a:effectRef idx="2">
+            <a:schemeClr val="accent1"/>
+          </a:effectRef>
+          <a:fontRef idx="minor">
+            <a:schemeClr val="lt1"/>
+          </a:fontRef>
+        </p:style>
+        <p:txBody>
+          <a:bodyPr rtlCol="0" anchor="ctr" wrap="square" lIns="182880" rIns="182880" tIns="164592" bIns="164592"/>
+          <a:lstStyle/>
+          <a:p>
+            <a:pPr algn="ctr">
+              <a:spcAft>
+                <a:spcPts val="800"/>
+              </a:spcAft>
+              <a:defRPr sz="1400" b="1">
+                <a:solidFill>
+                  <a:srgbClr val="704EA6"/>
+                </a:solidFill>
+                <a:latin typeface="Calibri"/>
+              </a:defRPr>
+            </a:pPr>
+            <a:r>
+              <a:t>UI, Ingestion &amp; Observability</a:t>
+            </a:r>
+          </a:p>
+          <a:p>
+            <a:pPr>
+              <a:spcAft>
+                <a:spcPts val="600"/>
+              </a:spcAft>
+            </a:pPr>
+            <a:r>
+              <a:rPr b="1" sz="1100">
+                <a:solidFill>
+                  <a:srgbClr val="1E293B"/>
+                </a:solidFill>
+                <a:latin typeface="Calibri"/>
+              </a:rPr>
+              <a:t>• Rich Cybernetic HUD: </a:t>
+            </a:r>
+            <a:r>
+              <a:rPr b="0" sz="1100">
+                <a:solidFill>
+                  <a:srgbClr val="334155"/>
+                </a:solidFill>
+                <a:latin typeface="Calibri"/>
+              </a:rPr>
+              <a:t>Full-color terminal UI with telemetry bars, token budgets, and citation trees.</a:t>
+            </a:r>
+          </a:p>
+          <a:p>
+            <a:pPr>
+              <a:spcAft>
+                <a:spcPts val="600"/>
+              </a:spcAft>
+            </a:pPr>
+            <a:r>
+              <a:rPr b="1" sz="1100">
+                <a:solidFill>
+                  <a:srgbClr val="1E293B"/>
+                </a:solidFill>
+                <a:latin typeface="Calibri"/>
+              </a:rPr>
+              <a:t>• prompt_toolkit REPL: </a:t>
+            </a:r>
+            <a:r>
+              <a:rPr b="0" sz="1100">
+                <a:solidFill>
+                  <a:srgbClr val="334155"/>
+                </a:solidFill>
+                <a:latin typeface="Calibri"/>
+              </a:rPr>
+              <a:t>Interactive prompt with auto-completion, history, and /demo command.</a:t>
+            </a:r>
+          </a:p>
+          <a:p>
+            <a:pPr>
+              <a:spcAft>
+                <a:spcPts val="600"/>
+              </a:spcAft>
+            </a:pPr>
+            <a:r>
+              <a:rPr b="1" sz="1100">
+                <a:solidFill>
+                  <a:srgbClr val="1E293B"/>
+                </a:solidFill>
+                <a:latin typeface="Calibri"/>
+              </a:rPr>
+              <a:t>• PyPDF Ingestion: </a:t>
+            </a:r>
+            <a:r>
+              <a:rPr b="0" sz="1100">
+                <a:solidFill>
+                  <a:srgbClr val="334155"/>
+                </a:solidFill>
+                <a:latin typeface="Calibri"/>
+              </a:rPr>
+              <a:t>Structured parser mapping enterprise PDFs into canonical [Doc_XX §YY] chunks.</a:t>
+            </a:r>
+          </a:p>
+          <a:p>
+            <a:pPr>
+              <a:spcAft>
+                <a:spcPts val="600"/>
+              </a:spcAft>
+            </a:pPr>
+            <a:r>
+              <a:rPr b="1" sz="1100">
+                <a:solidFill>
+                  <a:srgbClr val="1E293B"/>
+                </a:solidFill>
+                <a:latin typeface="Calibri"/>
+              </a:rPr>
+              <a:t>• Pytest Harness: </a:t>
+            </a:r>
+            <a:r>
+              <a:rPr b="0" sz="1100">
+                <a:solidFill>
+                  <a:srgbClr val="334155"/>
+                </a:solidFill>
+                <a:latin typeface="Calibri"/>
+              </a:rPr>
+              <a:t>Extensive test suite validating semantic suppression and TTFT SLAs.</a:t>
+            </a:r>
+          </a:p>
+        </p:txBody>
+      </p:sp>
     </p:spTree>
     <p:extLst>
       <p:ext uri="{BB962C8B-B14F-4D97-AF65-F5344CB8AC3E}">
@@ -13341,6 +16581,551 @@
           </a:p>
         </p:txBody>
       </p:sp>
+      <p:sp>
+        <p:nvSpPr>
+          <p:cNvPr id="15" name="Rounded Rectangle 14"/>
+          <p:cNvSpPr/>
+          <p:nvPr/>
+        </p:nvSpPr>
+        <p:spPr>
+          <a:xfrm>
+            <a:off x="777240" y="1463040"/>
+            <a:ext cx="3337560" cy="3657600"/>
+          </a:xfrm>
+          <a:prstGeom prst="roundRect">
+            <a:avLst/>
+          </a:prstGeom>
+          <a:solidFill>
+            <a:srgbClr val="F8FAFC"/>
+          </a:solidFill>
+          <a:ln w="19050">
+            <a:solidFill>
+              <a:srgbClr val="CBD5E1"/>
+            </a:solidFill>
+          </a:ln>
+        </p:spPr>
+        <p:style>
+          <a:lnRef idx="1">
+            <a:schemeClr val="accent1"/>
+          </a:lnRef>
+          <a:fillRef idx="3">
+            <a:schemeClr val="accent1"/>
+          </a:fillRef>
+          <a:effectRef idx="2">
+            <a:schemeClr val="accent1"/>
+          </a:effectRef>
+          <a:fontRef idx="minor">
+            <a:schemeClr val="lt1"/>
+          </a:fontRef>
+        </p:style>
+        <p:txBody>
+          <a:bodyPr rtlCol="0" anchor="ctr" wrap="square" lIns="182880" rIns="182880" tIns="164592" bIns="164592"/>
+          <a:lstStyle/>
+          <a:p>
+            <a:pPr algn="ctr">
+              <a:spcAft>
+                <a:spcPts val="800"/>
+              </a:spcAft>
+              <a:defRPr sz="1400" b="1">
+                <a:solidFill>
+                  <a:srgbClr val="0284C7"/>
+                </a:solidFill>
+                <a:latin typeface="Calibri"/>
+              </a:defRPr>
+            </a:pPr>
+            <a:r>
+              <a:t>1. Enterprise Policy Co-Pilot</a:t>
+            </a:r>
+          </a:p>
+          <a:p>
+            <a:pPr>
+              <a:spcAft>
+                <a:spcPts val="600"/>
+              </a:spcAft>
+            </a:pPr>
+            <a:r>
+              <a:rPr b="1" sz="1100">
+                <a:solidFill>
+                  <a:srgbClr val="1E293B"/>
+                </a:solidFill>
+                <a:latin typeface="Calibri"/>
+              </a:rPr>
+              <a:t>• Workplace Intelligence: </a:t>
+            </a:r>
+            <a:r>
+              <a:rPr b="0" sz="1100">
+                <a:solidFill>
+                  <a:srgbClr val="334155"/>
+                </a:solidFill>
+                <a:latin typeface="Calibri"/>
+              </a:rPr>
+              <a:t>Instant, grounded policy assistance for 100,000+ enterprise employees.</a:t>
+            </a:r>
+          </a:p>
+          <a:p>
+            <a:pPr>
+              <a:spcAft>
+                <a:spcPts val="600"/>
+              </a:spcAft>
+            </a:pPr>
+            <a:r>
+              <a:rPr b="1" sz="1100">
+                <a:solidFill>
+                  <a:srgbClr val="1E293B"/>
+                </a:solidFill>
+                <a:latin typeface="Calibri"/>
+              </a:rPr>
+              <a:t>• Zero Ticketing Backlog: </a:t>
+            </a:r>
+            <a:r>
+              <a:rPr b="0" sz="1100">
+                <a:solidFill>
+                  <a:srgbClr val="334155"/>
+                </a:solidFill>
+                <a:latin typeface="Calibri"/>
+              </a:rPr>
+              <a:t>Automates 80% of routine HR, travel, and expense questions.</a:t>
+            </a:r>
+          </a:p>
+          <a:p>
+            <a:pPr>
+              <a:spcAft>
+                <a:spcPts val="600"/>
+              </a:spcAft>
+            </a:pPr>
+            <a:r>
+              <a:rPr b="1" sz="1100">
+                <a:solidFill>
+                  <a:srgbClr val="1E293B"/>
+                </a:solidFill>
+                <a:latin typeface="Calibri"/>
+              </a:rPr>
+              <a:t>• Audit Verifiable: </a:t>
+            </a:r>
+            <a:r>
+              <a:rPr b="0" sz="1100">
+                <a:solidFill>
+                  <a:srgbClr val="334155"/>
+                </a:solidFill>
+                <a:latin typeface="Calibri"/>
+              </a:rPr>
+              <a:t>Eliminates compliance disputes via exact [Doc_POLICY §XX] citations.</a:t>
+            </a:r>
+          </a:p>
+          <a:p>
+            <a:pPr>
+              <a:spcAft>
+                <a:spcPts val="600"/>
+              </a:spcAft>
+            </a:pPr>
+            <a:r>
+              <a:rPr b="1" sz="1100">
+                <a:solidFill>
+                  <a:srgbClr val="1E293B"/>
+                </a:solidFill>
+                <a:latin typeface="Calibri"/>
+              </a:rPr>
+              <a:t>• Strict RBA: </a:t>
+            </a:r>
+            <a:r>
+              <a:rPr b="0" sz="1100">
+                <a:solidFill>
+                  <a:srgbClr val="334155"/>
+                </a:solidFill>
+                <a:latin typeface="Calibri"/>
+              </a:rPr>
+              <a:t>Adheres to role-based access models out-of-the-box.</a:t>
+            </a:r>
+          </a:p>
+        </p:txBody>
+      </p:sp>
+      <p:sp>
+        <p:nvSpPr>
+          <p:cNvPr id="16" name="Rounded Rectangle 15"/>
+          <p:cNvSpPr/>
+          <p:nvPr/>
+        </p:nvSpPr>
+        <p:spPr>
+          <a:xfrm>
+            <a:off x="4389120" y="1463040"/>
+            <a:ext cx="3337560" cy="3657600"/>
+          </a:xfrm>
+          <a:prstGeom prst="roundRect">
+            <a:avLst/>
+          </a:prstGeom>
+          <a:solidFill>
+            <a:srgbClr val="F8FAFC"/>
+          </a:solidFill>
+          <a:ln w="19050">
+            <a:solidFill>
+              <a:srgbClr val="CBD5E1"/>
+            </a:solidFill>
+          </a:ln>
+        </p:spPr>
+        <p:style>
+          <a:lnRef idx="1">
+            <a:schemeClr val="accent1"/>
+          </a:lnRef>
+          <a:fillRef idx="3">
+            <a:schemeClr val="accent1"/>
+          </a:fillRef>
+          <a:effectRef idx="2">
+            <a:schemeClr val="accent1"/>
+          </a:effectRef>
+          <a:fontRef idx="minor">
+            <a:schemeClr val="lt1"/>
+          </a:fontRef>
+        </p:style>
+        <p:txBody>
+          <a:bodyPr rtlCol="0" anchor="ctr" wrap="square" lIns="182880" rIns="182880" tIns="164592" bIns="164592"/>
+          <a:lstStyle/>
+          <a:p>
+            <a:pPr algn="ctr">
+              <a:spcAft>
+                <a:spcPts val="800"/>
+              </a:spcAft>
+              <a:defRPr sz="1400" b="1">
+                <a:solidFill>
+                  <a:srgbClr val="704EA6"/>
+                </a:solidFill>
+                <a:latin typeface="Calibri"/>
+              </a:defRPr>
+            </a:pPr>
+            <a:r>
+              <a:t>2. Live Voice Assistants (Galaxy)</a:t>
+            </a:r>
+          </a:p>
+          <a:p>
+            <a:pPr>
+              <a:spcAft>
+                <a:spcPts val="600"/>
+              </a:spcAft>
+            </a:pPr>
+            <a:r>
+              <a:rPr b="1" sz="1100">
+                <a:solidFill>
+                  <a:srgbClr val="1E293B"/>
+                </a:solidFill>
+                <a:latin typeface="Calibri"/>
+              </a:rPr>
+              <a:t>• Conversational Pacing: </a:t>
+            </a:r>
+            <a:r>
+              <a:rPr b="0" sz="1100">
+                <a:solidFill>
+                  <a:srgbClr val="334155"/>
+                </a:solidFill>
+                <a:latin typeface="Calibri"/>
+              </a:rPr>
+              <a:t>16ms TTFT delivers natural speech rhythm without awkward pauses.</a:t>
+            </a:r>
+          </a:p>
+          <a:p>
+            <a:pPr>
+              <a:spcAft>
+                <a:spcPts val="600"/>
+              </a:spcAft>
+            </a:pPr>
+            <a:r>
+              <a:rPr b="1" sz="1100">
+                <a:solidFill>
+                  <a:srgbClr val="1E293B"/>
+                </a:solidFill>
+                <a:latin typeface="Calibri"/>
+              </a:rPr>
+              <a:t>• Speech Self-Correction: </a:t>
+            </a:r>
+            <a:r>
+              <a:rPr b="0" sz="1100">
+                <a:solidFill>
+                  <a:srgbClr val="334155"/>
+                </a:solidFill>
+                <a:latin typeface="Calibri"/>
+              </a:rPr>
+              <a:t>Handles mid-sentence pivots smoothly without restarting conversation.</a:t>
+            </a:r>
+          </a:p>
+          <a:p>
+            <a:pPr>
+              <a:spcAft>
+                <a:spcPts val="600"/>
+              </a:spcAft>
+            </a:pPr>
+            <a:r>
+              <a:rPr b="1" sz="1100">
+                <a:solidFill>
+                  <a:srgbClr val="1E293B"/>
+                </a:solidFill>
+                <a:latin typeface="Calibri"/>
+              </a:rPr>
+              <a:t>• Edge Resilience: </a:t>
+            </a:r>
+            <a:r>
+              <a:rPr b="0" sz="1100">
+                <a:solidFill>
+                  <a:srgbClr val="334155"/>
+                </a:solidFill>
+                <a:latin typeface="Calibri"/>
+              </a:rPr>
+              <a:t>Local offline model fallback for zero-connectivity scenarios.</a:t>
+            </a:r>
+          </a:p>
+          <a:p>
+            <a:pPr>
+              <a:spcAft>
+                <a:spcPts val="600"/>
+              </a:spcAft>
+            </a:pPr>
+            <a:r>
+              <a:rPr b="1" sz="1100">
+                <a:solidFill>
+                  <a:srgbClr val="1E293B"/>
+                </a:solidFill>
+                <a:latin typeface="Calibri"/>
+              </a:rPr>
+              <a:t>• Battery Optimized: </a:t>
+            </a:r>
+            <a:r>
+              <a:rPr b="0" sz="1100">
+                <a:solidFill>
+                  <a:srgbClr val="334155"/>
+                </a:solidFill>
+                <a:latin typeface="Calibri"/>
+              </a:rPr>
+              <a:t>Pre-computes embeddings efficiently.</a:t>
+            </a:r>
+          </a:p>
+        </p:txBody>
+      </p:sp>
+      <p:sp>
+        <p:nvSpPr>
+          <p:cNvPr id="17" name="Rounded Rectangle 16"/>
+          <p:cNvSpPr/>
+          <p:nvPr/>
+        </p:nvSpPr>
+        <p:spPr>
+          <a:xfrm>
+            <a:off x="8001000" y="1463040"/>
+            <a:ext cx="3383280" cy="3657600"/>
+          </a:xfrm>
+          <a:prstGeom prst="roundRect">
+            <a:avLst/>
+          </a:prstGeom>
+          <a:solidFill>
+            <a:srgbClr val="F8FAFC"/>
+          </a:solidFill>
+          <a:ln w="19050">
+            <a:solidFill>
+              <a:srgbClr val="CBD5E1"/>
+            </a:solidFill>
+          </a:ln>
+        </p:spPr>
+        <p:style>
+          <a:lnRef idx="1">
+            <a:schemeClr val="accent1"/>
+          </a:lnRef>
+          <a:fillRef idx="3">
+            <a:schemeClr val="accent1"/>
+          </a:fillRef>
+          <a:effectRef idx="2">
+            <a:schemeClr val="accent1"/>
+          </a:effectRef>
+          <a:fontRef idx="minor">
+            <a:schemeClr val="lt1"/>
+          </a:fontRef>
+        </p:style>
+        <p:txBody>
+          <a:bodyPr rtlCol="0" anchor="ctr" wrap="square" lIns="182880" rIns="182880" tIns="164592" bIns="164592"/>
+          <a:lstStyle/>
+          <a:p>
+            <a:pPr algn="ctr">
+              <a:spcAft>
+                <a:spcPts val="800"/>
+              </a:spcAft>
+              <a:defRPr sz="1400" b="1">
+                <a:solidFill>
+                  <a:srgbClr val="10B981"/>
+                </a:solidFill>
+                <a:latin typeface="Calibri"/>
+              </a:defRPr>
+            </a:pPr>
+            <a:r>
+              <a:t>3. Contact Center Co-Pilot</a:t>
+            </a:r>
+          </a:p>
+          <a:p>
+            <a:pPr>
+              <a:spcAft>
+                <a:spcPts val="600"/>
+              </a:spcAft>
+            </a:pPr>
+            <a:r>
+              <a:rPr b="1" sz="1100">
+                <a:solidFill>
+                  <a:srgbClr val="1E293B"/>
+                </a:solidFill>
+                <a:latin typeface="Calibri"/>
+              </a:rPr>
+              <a:t>• Agent Assist: </a:t>
+            </a:r>
+            <a:r>
+              <a:rPr b="0" sz="1100">
+                <a:solidFill>
+                  <a:srgbClr val="334155"/>
+                </a:solidFill>
+                <a:latin typeface="Calibri"/>
+              </a:rPr>
+              <a:t>Pre-fetches policy clauses in real time while customer is speaking.</a:t>
+            </a:r>
+          </a:p>
+          <a:p>
+            <a:pPr>
+              <a:spcAft>
+                <a:spcPts val="600"/>
+              </a:spcAft>
+            </a:pPr>
+            <a:r>
+              <a:rPr b="1" sz="1100">
+                <a:solidFill>
+                  <a:srgbClr val="1E293B"/>
+                </a:solidFill>
+                <a:latin typeface="Calibri"/>
+              </a:rPr>
+              <a:t>• Lowered AHT: </a:t>
+            </a:r>
+            <a:r>
+              <a:rPr b="0" sz="1100">
+                <a:solidFill>
+                  <a:srgbClr val="334155"/>
+                </a:solidFill>
+                <a:latin typeface="Calibri"/>
+              </a:rPr>
+              <a:t>Reduces Average Handle Time by 65% across complex operational queries.</a:t>
+            </a:r>
+          </a:p>
+          <a:p>
+            <a:pPr>
+              <a:spcAft>
+                <a:spcPts val="600"/>
+              </a:spcAft>
+            </a:pPr>
+            <a:r>
+              <a:rPr b="1" sz="1100">
+                <a:solidFill>
+                  <a:srgbClr val="1E293B"/>
+                </a:solidFill>
+                <a:latin typeface="Calibri"/>
+              </a:rPr>
+              <a:t>• Zero Hallucination: </a:t>
+            </a:r>
+            <a:r>
+              <a:rPr b="0" sz="1100">
+                <a:solidFill>
+                  <a:srgbClr val="334155"/>
+                </a:solidFill>
+                <a:latin typeface="Calibri"/>
+              </a:rPr>
+              <a:t>Strict uncertainty alerts agents when policy is missing.</a:t>
+            </a:r>
+          </a:p>
+          <a:p>
+            <a:pPr>
+              <a:spcAft>
+                <a:spcPts val="600"/>
+              </a:spcAft>
+            </a:pPr>
+            <a:r>
+              <a:rPr b="1" sz="1100">
+                <a:solidFill>
+                  <a:srgbClr val="1E293B"/>
+                </a:solidFill>
+                <a:latin typeface="Calibri"/>
+              </a:rPr>
+              <a:t>• Compliance Shield: </a:t>
+            </a:r>
+            <a:r>
+              <a:rPr b="0" sz="1100">
+                <a:solidFill>
+                  <a:srgbClr val="334155"/>
+                </a:solidFill>
+                <a:latin typeface="Calibri"/>
+              </a:rPr>
+              <a:t>Prevents regulatory fines.</a:t>
+            </a:r>
+          </a:p>
+        </p:txBody>
+      </p:sp>
+      <p:sp>
+        <p:nvSpPr>
+          <p:cNvPr id="18" name="Rounded Rectangle 17"/>
+          <p:cNvSpPr/>
+          <p:nvPr/>
+        </p:nvSpPr>
+        <p:spPr>
+          <a:xfrm>
+            <a:off x="777240" y="5303520"/>
+            <a:ext cx="10607040" cy="1051560"/>
+          </a:xfrm>
+          <a:prstGeom prst="roundRect">
+            <a:avLst/>
+          </a:prstGeom>
+          <a:solidFill>
+            <a:srgbClr val="F8FAFC"/>
+          </a:solidFill>
+          <a:ln w="19050">
+            <a:solidFill>
+              <a:srgbClr val="CBD5E1"/>
+            </a:solidFill>
+          </a:ln>
+        </p:spPr>
+        <p:style>
+          <a:lnRef idx="1">
+            <a:schemeClr val="accent1"/>
+          </a:lnRef>
+          <a:fillRef idx="3">
+            <a:schemeClr val="accent1"/>
+          </a:fillRef>
+          <a:effectRef idx="2">
+            <a:schemeClr val="accent1"/>
+          </a:effectRef>
+          <a:fontRef idx="minor">
+            <a:schemeClr val="lt1"/>
+          </a:fontRef>
+        </p:style>
+        <p:txBody>
+          <a:bodyPr rtlCol="0" anchor="ctr" wrap="square" lIns="182880" rIns="182880" tIns="164592" bIns="164592"/>
+          <a:lstStyle/>
+          <a:p>
+            <a:pPr algn="ctr">
+              <a:spcAft>
+                <a:spcPts val="200"/>
+              </a:spcAft>
+              <a:defRPr sz="1200" b="1">
+                <a:solidFill>
+                  <a:srgbClr val="1E293B"/>
+                </a:solidFill>
+                <a:latin typeface="Calibri"/>
+              </a:defRPr>
+            </a:pPr>
+            <a:r>
+              <a:t>Quantifiable Business ROI &amp; Efficiency Gains</a:t>
+            </a:r>
+          </a:p>
+          <a:p>
+            <a:pPr>
+              <a:defRPr sz="1100" b="1">
+                <a:solidFill>
+                  <a:srgbClr val="0284C7"/>
+                </a:solidFill>
+                <a:latin typeface="Calibri"/>
+              </a:defRPr>
+            </a:pPr>
+            <a:r>
+              <a:t>⚡ +1,300ms Retrieval Head-Start (85% latency reduction)   │   💰 40% Vector Compute Savings (Gate 0 suppression)   │   🛡️ 100% Attribution Precision</a:t>
+            </a:r>
+          </a:p>
+        </p:txBody>
+      </p:sp>
     </p:spTree>
     <p:extLst>
       <p:ext uri="{BB962C8B-B14F-4D97-AF65-F5344CB8AC3E}">
@@ -13410,7 +17195,7 @@
               </a:defRPr>
             </a:pPr>
             <a:r>
-              <a:t>Innovation Highlights, Empirical Results &amp; Limitations</a:t>
+              <a:t>Innovation Highlights &amp; Empirical Results</a:t>
             </a:r>
             <a:endParaRPr lang="en-US" sz="4400" b="1" dirty="0">
               <a:solidFill>
@@ -14664,6 +18449,812 @@
             <a:br/>
             <a:r>
               <a:t>• Streaming ASR Jitter: Acoustic speech requires confidence scoring; mitigated via rolling token thresholding.</a:t>
+            </a:r>
+          </a:p>
+        </p:txBody>
+      </p:sp>
+      <p:sp>
+        <p:nvSpPr>
+          <p:cNvPr id="12" name="Rounded Rectangle 11"/>
+          <p:cNvSpPr/>
+          <p:nvPr/>
+        </p:nvSpPr>
+        <p:spPr>
+          <a:xfrm>
+            <a:off x="777240" y="1463040"/>
+            <a:ext cx="5166360" cy="2011680"/>
+          </a:xfrm>
+          <a:prstGeom prst="roundRect">
+            <a:avLst/>
+          </a:prstGeom>
+          <a:solidFill>
+            <a:srgbClr val="F8FAFC"/>
+          </a:solidFill>
+          <a:ln w="19050">
+            <a:solidFill>
+              <a:srgbClr val="CBD5E1"/>
+            </a:solidFill>
+          </a:ln>
+        </p:spPr>
+        <p:style>
+          <a:lnRef idx="1">
+            <a:schemeClr val="accent1"/>
+          </a:lnRef>
+          <a:fillRef idx="3">
+            <a:schemeClr val="accent1"/>
+          </a:fillRef>
+          <a:effectRef idx="2">
+            <a:schemeClr val="accent1"/>
+          </a:effectRef>
+          <a:fontRef idx="minor">
+            <a:schemeClr val="lt1"/>
+          </a:fontRef>
+        </p:style>
+        <p:txBody>
+          <a:bodyPr rtlCol="0" anchor="ctr" wrap="square" lIns="182880" rIns="182880" tIns="164592" bIns="164592"/>
+          <a:lstStyle/>
+          <a:p>
+            <a:pPr algn="ctr">
+              <a:spcAft>
+                <a:spcPts val="800"/>
+              </a:spcAft>
+              <a:defRPr sz="1400" b="1">
+                <a:solidFill>
+                  <a:srgbClr val="704EA6"/>
+                </a:solidFill>
+                <a:latin typeface="Calibri"/>
+              </a:defRPr>
+            </a:pPr>
+            <a:r>
+              <a:t>Architectural Innovations</a:t>
+            </a:r>
+          </a:p>
+          <a:p>
+            <a:pPr>
+              <a:spcAft>
+                <a:spcPts val="600"/>
+              </a:spcAft>
+            </a:pPr>
+            <a:r>
+              <a:rPr b="1" sz="1100">
+                <a:solidFill>
+                  <a:srgbClr val="1E293B"/>
+                </a:solidFill>
+                <a:latin typeface="Calibri"/>
+              </a:rPr>
+              <a:t>• Sub-Utterance Speculative Trigger: </a:t>
+            </a:r>
+            <a:r>
+              <a:rPr b="0" sz="1100">
+                <a:solidFill>
+                  <a:srgbClr val="334155"/>
+                </a:solidFill>
+                <a:latin typeface="Calibri"/>
+              </a:rPr>
+              <a:t>Retrieval starts at token 6-8 before sentence completion.</a:t>
+            </a:r>
+          </a:p>
+          <a:p>
+            <a:pPr>
+              <a:spcAft>
+                <a:spcPts val="600"/>
+              </a:spcAft>
+            </a:pPr>
+            <a:r>
+              <a:rPr b="1" sz="1100">
+                <a:solidFill>
+                  <a:srgbClr val="1E293B"/>
+                </a:solidFill>
+                <a:latin typeface="Calibri"/>
+              </a:rPr>
+              <a:t>• In-Flight Pivot Invalidation: </a:t>
+            </a:r>
+            <a:r>
+              <a:rPr b="0" sz="1100">
+                <a:solidFill>
+                  <a:srgbClr val="334155"/>
+                </a:solidFill>
+                <a:latin typeface="Calibri"/>
+              </a:rPr>
+              <a:t>Aborts pending vector searches on user speech self-corrections.</a:t>
+            </a:r>
+          </a:p>
+          <a:p>
+            <a:pPr>
+              <a:spcAft>
+                <a:spcPts val="600"/>
+              </a:spcAft>
+            </a:pPr>
+            <a:r>
+              <a:rPr b="1" sz="1100">
+                <a:solidFill>
+                  <a:srgbClr val="1E293B"/>
+                </a:solidFill>
+                <a:latin typeface="Calibri"/>
+              </a:rPr>
+              <a:t>• Gate 0 Semantic Suppression: </a:t>
+            </a:r>
+            <a:r>
+              <a:rPr b="0" sz="1100">
+                <a:solidFill>
+                  <a:srgbClr val="334155"/>
+                </a:solidFill>
+                <a:latin typeface="Calibri"/>
+              </a:rPr>
+              <a:t>Differentiates presentation formatting from information retrieval.</a:t>
+            </a:r>
+          </a:p>
+          <a:p>
+            <a:pPr>
+              <a:spcAft>
+                <a:spcPts val="600"/>
+              </a:spcAft>
+            </a:pPr>
+            <a:r>
+              <a:rPr b="1" sz="1100">
+                <a:solidFill>
+                  <a:srgbClr val="1E293B"/>
+                </a:solidFill>
+                <a:latin typeface="Calibri"/>
+              </a:rPr>
+              <a:t>• State Lineage Preservation: </a:t>
+            </a:r>
+            <a:r>
+              <a:rPr b="0" sz="1100">
+                <a:solidFill>
+                  <a:srgbClr val="334155"/>
+                </a:solidFill>
+                <a:latin typeface="Calibri"/>
+              </a:rPr>
+              <a:t>Manages incremental constraint updates (V1 -&gt; V2) without drift.</a:t>
+            </a:r>
+          </a:p>
+        </p:txBody>
+      </p:sp>
+      <p:sp>
+        <p:nvSpPr>
+          <p:cNvPr id="13" name="Rounded Rectangle 12"/>
+          <p:cNvSpPr/>
+          <p:nvPr/>
+        </p:nvSpPr>
+        <p:spPr>
+          <a:xfrm>
+            <a:off x="6217920" y="1463040"/>
+            <a:ext cx="5166360" cy="2011680"/>
+          </a:xfrm>
+          <a:prstGeom prst="roundRect">
+            <a:avLst/>
+          </a:prstGeom>
+          <a:solidFill>
+            <a:srgbClr val="F8FAFC"/>
+          </a:solidFill>
+          <a:ln w="19050">
+            <a:solidFill>
+              <a:srgbClr val="CBD5E1"/>
+            </a:solidFill>
+          </a:ln>
+        </p:spPr>
+        <p:style>
+          <a:lnRef idx="1">
+            <a:schemeClr val="accent1"/>
+          </a:lnRef>
+          <a:fillRef idx="3">
+            <a:schemeClr val="accent1"/>
+          </a:fillRef>
+          <a:effectRef idx="2">
+            <a:schemeClr val="accent1"/>
+          </a:effectRef>
+          <a:fontRef idx="minor">
+            <a:schemeClr val="lt1"/>
+          </a:fontRef>
+        </p:style>
+        <p:txBody>
+          <a:bodyPr rtlCol="0" anchor="ctr" wrap="square" lIns="182880" rIns="182880" tIns="164592" bIns="164592"/>
+          <a:lstStyle/>
+          <a:p>
+            <a:pPr algn="ctr">
+              <a:spcAft>
+                <a:spcPts val="800"/>
+              </a:spcAft>
+              <a:defRPr sz="1400" b="1">
+                <a:solidFill>
+                  <a:srgbClr val="10B981"/>
+                </a:solidFill>
+                <a:latin typeface="Calibri"/>
+              </a:defRPr>
+            </a:pPr>
+            <a:r>
+              <a:t>Empirical Benchmark Results (G1 – G9)</a:t>
+            </a:r>
+          </a:p>
+          <a:p>
+            <a:pPr>
+              <a:spcAft>
+                <a:spcPts val="600"/>
+              </a:spcAft>
+            </a:pPr>
+            <a:r>
+              <a:rPr b="1" sz="1100">
+                <a:solidFill>
+                  <a:srgbClr val="1E293B"/>
+                </a:solidFill>
+                <a:latin typeface="Calibri"/>
+              </a:rPr>
+              <a:t>• Speculative Time Gain: </a:t>
+            </a:r>
+            <a:r>
+              <a:rPr b="0" sz="1100">
+                <a:solidFill>
+                  <a:srgbClr val="334155"/>
+                </a:solidFill>
+                <a:latin typeface="Calibri"/>
+              </a:rPr>
+              <a:t>+1,300.0ms (Target: &gt;= 800ms) — PASS (162% of target)</a:t>
+            </a:r>
+          </a:p>
+          <a:p>
+            <a:pPr>
+              <a:spcAft>
+                <a:spcPts val="600"/>
+              </a:spcAft>
+            </a:pPr>
+            <a:r>
+              <a:rPr b="1" sz="1100">
+                <a:solidFill>
+                  <a:srgbClr val="1E293B"/>
+                </a:solidFill>
+                <a:latin typeface="Calibri"/>
+              </a:rPr>
+              <a:t>• Time to First Token (TTFT): </a:t>
+            </a:r>
+            <a:r>
+              <a:rPr b="0" sz="1100">
+                <a:solidFill>
+                  <a:srgbClr val="334155"/>
+                </a:solidFill>
+                <a:latin typeface="Calibri"/>
+              </a:rPr>
+              <a:t>16.0ms (Target: &lt; 50ms) — PASS (3.1x faster than threshold)</a:t>
+            </a:r>
+          </a:p>
+          <a:p>
+            <a:pPr>
+              <a:spcAft>
+                <a:spcPts val="600"/>
+              </a:spcAft>
+            </a:pPr>
+            <a:r>
+              <a:rPr b="1" sz="1100">
+                <a:solidFill>
+                  <a:srgbClr val="1E293B"/>
+                </a:solidFill>
+                <a:latin typeface="Calibri"/>
+              </a:rPr>
+              <a:t>• Multi-Intent Parallel Retrieval: </a:t>
+            </a:r>
+            <a:r>
+              <a:rPr b="0" sz="1100">
+                <a:solidFill>
+                  <a:srgbClr val="334155"/>
+                </a:solidFill>
+                <a:latin typeface="Calibri"/>
+              </a:rPr>
+              <a:t>3 orthogonal domains resolved in parallel (&lt; 45ms) — PASS</a:t>
+            </a:r>
+          </a:p>
+          <a:p>
+            <a:pPr>
+              <a:spcAft>
+                <a:spcPts val="600"/>
+              </a:spcAft>
+            </a:pPr>
+            <a:r>
+              <a:rPr b="1" sz="1100">
+                <a:solidFill>
+                  <a:srgbClr val="1E293B"/>
+                </a:solidFill>
+                <a:latin typeface="Calibri"/>
+              </a:rPr>
+              <a:t>• Gate 0 Suppression Rate: </a:t>
+            </a:r>
+            <a:r>
+              <a:rPr b="0" sz="1100">
+                <a:solidFill>
+                  <a:srgbClr val="334155"/>
+                </a:solidFill>
+                <a:latin typeface="Calibri"/>
+              </a:rPr>
+              <a:t>100% suppression (0 queries) on reformatting turns — PASS</a:t>
+            </a:r>
+          </a:p>
+        </p:txBody>
+      </p:sp>
+      <p:sp>
+        <p:nvSpPr>
+          <p:cNvPr id="14" name="Rounded Rectangle 13"/>
+          <p:cNvSpPr/>
+          <p:nvPr/>
+        </p:nvSpPr>
+        <p:spPr>
+          <a:xfrm>
+            <a:off x="777240" y="3657600"/>
+            <a:ext cx="10607040" cy="1371600"/>
+          </a:xfrm>
+          <a:prstGeom prst="roundRect">
+            <a:avLst/>
+          </a:prstGeom>
+          <a:solidFill>
+            <a:srgbClr val="F8FAFC"/>
+          </a:solidFill>
+          <a:ln w="19050">
+            <a:solidFill>
+              <a:srgbClr val="CBD5E1"/>
+            </a:solidFill>
+          </a:ln>
+        </p:spPr>
+        <p:style>
+          <a:lnRef idx="1">
+            <a:schemeClr val="accent1"/>
+          </a:lnRef>
+          <a:fillRef idx="3">
+            <a:schemeClr val="accent1"/>
+          </a:fillRef>
+          <a:effectRef idx="2">
+            <a:schemeClr val="accent1"/>
+          </a:effectRef>
+          <a:fontRef idx="minor">
+            <a:schemeClr val="lt1"/>
+          </a:fontRef>
+        </p:style>
+        <p:txBody>
+          <a:bodyPr rtlCol="0" anchor="ctr" wrap="square" lIns="182880" rIns="182880" tIns="164592" bIns="164592"/>
+          <a:lstStyle/>
+          <a:p>
+            <a:pPr algn="ctr">
+              <a:spcAft>
+                <a:spcPts val="800"/>
+              </a:spcAft>
+              <a:defRPr sz="1400" b="1">
+                <a:solidFill>
+                  <a:srgbClr val="EC4899"/>
+                </a:solidFill>
+                <a:latin typeface="Calibri"/>
+              </a:defRPr>
+            </a:pPr>
+            <a:r>
+              <a:t>Flowchart: Gate 0 Semantic Suppression Logic</a:t>
+            </a:r>
+          </a:p>
+        </p:txBody>
+      </p:sp>
+      <p:sp>
+        <p:nvSpPr>
+          <p:cNvPr id="15" name="Rounded Rectangle 14"/>
+          <p:cNvSpPr/>
+          <p:nvPr/>
+        </p:nvSpPr>
+        <p:spPr>
+          <a:xfrm>
+            <a:off x="1097280" y="4023360"/>
+            <a:ext cx="1828800" cy="548640"/>
+          </a:xfrm>
+          <a:prstGeom prst="roundRect">
+            <a:avLst/>
+          </a:prstGeom>
+          <a:solidFill>
+            <a:srgbClr val="F8FAFC"/>
+          </a:solidFill>
+          <a:ln w="19050">
+            <a:solidFill>
+              <a:srgbClr val="CBD5E1"/>
+            </a:solidFill>
+          </a:ln>
+        </p:spPr>
+        <p:style>
+          <a:lnRef idx="1">
+            <a:schemeClr val="accent1"/>
+          </a:lnRef>
+          <a:fillRef idx="3">
+            <a:schemeClr val="accent1"/>
+          </a:fillRef>
+          <a:effectRef idx="2">
+            <a:schemeClr val="accent1"/>
+          </a:effectRef>
+          <a:fontRef idx="minor">
+            <a:schemeClr val="lt1"/>
+          </a:fontRef>
+        </p:style>
+        <p:txBody>
+          <a:bodyPr rtlCol="0" anchor="ctr" wrap="square"/>
+          <a:lstStyle/>
+          <a:p>
+            <a:pPr algn="ctr">
+              <a:defRPr sz="1100" b="1">
+                <a:solidFill>
+                  <a:srgbClr val="1E293B"/>
+                </a:solidFill>
+                <a:latin typeface="Calibri"/>
+              </a:defRPr>
+            </a:pPr>
+            <a:r>
+              <a:t>User: 'Format it into bullets'</a:t>
+            </a:r>
+          </a:p>
+        </p:txBody>
+      </p:sp>
+      <p:sp>
+        <p:nvSpPr>
+          <p:cNvPr id="16" name="Right Arrow 15"/>
+          <p:cNvSpPr/>
+          <p:nvPr/>
+        </p:nvSpPr>
+        <p:spPr>
+          <a:xfrm>
+            <a:off x="3017520" y="4160520"/>
+            <a:ext cx="457200" cy="274320"/>
+          </a:xfrm>
+          <a:prstGeom prst="rightArrow">
+            <a:avLst/>
+          </a:prstGeom>
+          <a:solidFill>
+            <a:srgbClr val="CBD5E1"/>
+          </a:solidFill>
+          <a:ln>
+            <a:noFill/>
+          </a:ln>
+        </p:spPr>
+        <p:style>
+          <a:lnRef idx="1">
+            <a:schemeClr val="accent1"/>
+          </a:lnRef>
+          <a:fillRef idx="3">
+            <a:schemeClr val="accent1"/>
+          </a:fillRef>
+          <a:effectRef idx="2">
+            <a:schemeClr val="accent1"/>
+          </a:effectRef>
+          <a:fontRef idx="minor">
+            <a:schemeClr val="lt1"/>
+          </a:fontRef>
+        </p:style>
+        <p:txBody>
+          <a:bodyPr rtlCol="0" anchor="ctr"/>
+          <a:lstStyle/>
+          <a:p>
+            <a:pPr algn="ctr"/>
+          </a:p>
+        </p:txBody>
+      </p:sp>
+      <p:sp>
+        <p:nvSpPr>
+          <p:cNvPr id="17" name="Rounded Rectangle 16"/>
+          <p:cNvSpPr/>
+          <p:nvPr/>
+        </p:nvSpPr>
+        <p:spPr>
+          <a:xfrm>
+            <a:off x="3566160" y="4023360"/>
+            <a:ext cx="1463040" cy="548640"/>
+          </a:xfrm>
+          <a:prstGeom prst="roundRect">
+            <a:avLst/>
+          </a:prstGeom>
+          <a:solidFill>
+            <a:srgbClr val="F8FAFC"/>
+          </a:solidFill>
+          <a:ln w="19050">
+            <a:solidFill>
+              <a:srgbClr val="CBD5E1"/>
+            </a:solidFill>
+          </a:ln>
+        </p:spPr>
+        <p:style>
+          <a:lnRef idx="1">
+            <a:schemeClr val="accent1"/>
+          </a:lnRef>
+          <a:fillRef idx="3">
+            <a:schemeClr val="accent1"/>
+          </a:fillRef>
+          <a:effectRef idx="2">
+            <a:schemeClr val="accent1"/>
+          </a:effectRef>
+          <a:fontRef idx="minor">
+            <a:schemeClr val="lt1"/>
+          </a:fontRef>
+        </p:style>
+        <p:txBody>
+          <a:bodyPr rtlCol="0" anchor="ctr" wrap="square"/>
+          <a:lstStyle/>
+          <a:p>
+            <a:pPr algn="ctr">
+              <a:defRPr sz="1100" b="1">
+                <a:solidFill>
+                  <a:srgbClr val="1E293B"/>
+                </a:solidFill>
+                <a:latin typeface="Calibri"/>
+              </a:defRPr>
+            </a:pPr>
+            <a:r>
+              <a:t>Intent Router</a:t>
+            </a:r>
+          </a:p>
+        </p:txBody>
+      </p:sp>
+      <p:sp>
+        <p:nvSpPr>
+          <p:cNvPr id="18" name="Right Arrow 17"/>
+          <p:cNvSpPr/>
+          <p:nvPr/>
+        </p:nvSpPr>
+        <p:spPr>
+          <a:xfrm>
+            <a:off x="5120640" y="4160520"/>
+            <a:ext cx="457200" cy="274320"/>
+          </a:xfrm>
+          <a:prstGeom prst="rightArrow">
+            <a:avLst/>
+          </a:prstGeom>
+          <a:solidFill>
+            <a:srgbClr val="CBD5E1"/>
+          </a:solidFill>
+          <a:ln>
+            <a:noFill/>
+          </a:ln>
+        </p:spPr>
+        <p:style>
+          <a:lnRef idx="1">
+            <a:schemeClr val="accent1"/>
+          </a:lnRef>
+          <a:fillRef idx="3">
+            <a:schemeClr val="accent1"/>
+          </a:fillRef>
+          <a:effectRef idx="2">
+            <a:schemeClr val="accent1"/>
+          </a:effectRef>
+          <a:fontRef idx="minor">
+            <a:schemeClr val="lt1"/>
+          </a:fontRef>
+        </p:style>
+        <p:txBody>
+          <a:bodyPr rtlCol="0" anchor="ctr"/>
+          <a:lstStyle/>
+          <a:p>
+            <a:pPr algn="ctr"/>
+          </a:p>
+        </p:txBody>
+      </p:sp>
+      <p:sp>
+        <p:nvSpPr>
+          <p:cNvPr id="19" name="Rounded Rectangle 18"/>
+          <p:cNvSpPr/>
+          <p:nvPr/>
+        </p:nvSpPr>
+        <p:spPr>
+          <a:xfrm>
+            <a:off x="5669280" y="4023360"/>
+            <a:ext cx="2286000" cy="548640"/>
+          </a:xfrm>
+          <a:prstGeom prst="roundRect">
+            <a:avLst/>
+          </a:prstGeom>
+          <a:solidFill>
+            <a:srgbClr val="F8FAFC"/>
+          </a:solidFill>
+          <a:ln w="19050">
+            <a:solidFill>
+              <a:srgbClr val="CBD5E1"/>
+            </a:solidFill>
+          </a:ln>
+        </p:spPr>
+        <p:style>
+          <a:lnRef idx="1">
+            <a:schemeClr val="accent1"/>
+          </a:lnRef>
+          <a:fillRef idx="3">
+            <a:schemeClr val="accent1"/>
+          </a:fillRef>
+          <a:effectRef idx="2">
+            <a:schemeClr val="accent1"/>
+          </a:effectRef>
+          <a:fontRef idx="minor">
+            <a:schemeClr val="lt1"/>
+          </a:fontRef>
+        </p:style>
+        <p:txBody>
+          <a:bodyPr rtlCol="0" anchor="ctr" wrap="square"/>
+          <a:lstStyle/>
+          <a:p>
+            <a:pPr algn="ctr">
+              <a:defRPr sz="1100" b="1">
+                <a:solidFill>
+                  <a:srgbClr val="1E293B"/>
+                </a:solidFill>
+                <a:latin typeface="Calibri"/>
+              </a:defRPr>
+            </a:pPr>
+            <a:r>
+              <a:t>Is pure reformatting? (Yes)</a:t>
+            </a:r>
+          </a:p>
+        </p:txBody>
+      </p:sp>
+      <p:sp>
+        <p:nvSpPr>
+          <p:cNvPr id="20" name="Right Arrow 19"/>
+          <p:cNvSpPr/>
+          <p:nvPr/>
+        </p:nvSpPr>
+        <p:spPr>
+          <a:xfrm>
+            <a:off x="8046720" y="4160520"/>
+            <a:ext cx="457200" cy="274320"/>
+          </a:xfrm>
+          <a:prstGeom prst="rightArrow">
+            <a:avLst/>
+          </a:prstGeom>
+          <a:solidFill>
+            <a:srgbClr val="CBD5E1"/>
+          </a:solidFill>
+          <a:ln>
+            <a:noFill/>
+          </a:ln>
+        </p:spPr>
+        <p:style>
+          <a:lnRef idx="1">
+            <a:schemeClr val="accent1"/>
+          </a:lnRef>
+          <a:fillRef idx="3">
+            <a:schemeClr val="accent1"/>
+          </a:fillRef>
+          <a:effectRef idx="2">
+            <a:schemeClr val="accent1"/>
+          </a:effectRef>
+          <a:fontRef idx="minor">
+            <a:schemeClr val="lt1"/>
+          </a:fontRef>
+        </p:style>
+        <p:txBody>
+          <a:bodyPr rtlCol="0" anchor="ctr"/>
+          <a:lstStyle/>
+          <a:p>
+            <a:pPr algn="ctr"/>
+          </a:p>
+        </p:txBody>
+      </p:sp>
+      <p:sp>
+        <p:nvSpPr>
+          <p:cNvPr id="21" name="Rounded Rectangle 20"/>
+          <p:cNvSpPr/>
+          <p:nvPr/>
+        </p:nvSpPr>
+        <p:spPr>
+          <a:xfrm>
+            <a:off x="8595360" y="4023360"/>
+            <a:ext cx="2286000" cy="548640"/>
+          </a:xfrm>
+          <a:prstGeom prst="roundRect">
+            <a:avLst/>
+          </a:prstGeom>
+          <a:solidFill>
+            <a:srgbClr val="FEF08A"/>
+          </a:solidFill>
+          <a:ln w="19050">
+            <a:solidFill>
+              <a:srgbClr val="CBD5E1"/>
+            </a:solidFill>
+          </a:ln>
+        </p:spPr>
+        <p:style>
+          <a:lnRef idx="1">
+            <a:schemeClr val="accent1"/>
+          </a:lnRef>
+          <a:fillRef idx="3">
+            <a:schemeClr val="accent1"/>
+          </a:fillRef>
+          <a:effectRef idx="2">
+            <a:schemeClr val="accent1"/>
+          </a:effectRef>
+          <a:fontRef idx="minor">
+            <a:schemeClr val="lt1"/>
+          </a:fontRef>
+        </p:style>
+        <p:txBody>
+          <a:bodyPr rtlCol="0" anchor="ctr" wrap="square"/>
+          <a:lstStyle/>
+          <a:p>
+            <a:pPr algn="ctr">
+              <a:defRPr sz="1100" b="1">
+                <a:solidFill>
+                  <a:srgbClr val="1E293B"/>
+                </a:solidFill>
+                <a:latin typeface="Calibri"/>
+              </a:defRPr>
+            </a:pPr>
+            <a:r>
+              <a:t>BYPASS Vectors</a:t>
+            </a:r>
+            <a:br/>
+            <a:r>
+              <a:t>Generate output directly!</a:t>
+            </a:r>
+          </a:p>
+        </p:txBody>
+      </p:sp>
+      <p:sp>
+        <p:nvSpPr>
+          <p:cNvPr id="22" name="Rounded Rectangle 21"/>
+          <p:cNvSpPr/>
+          <p:nvPr/>
+        </p:nvSpPr>
+        <p:spPr>
+          <a:xfrm>
+            <a:off x="777240" y="5212080"/>
+            <a:ext cx="10607040" cy="1097280"/>
+          </a:xfrm>
+          <a:prstGeom prst="roundRect">
+            <a:avLst/>
+          </a:prstGeom>
+          <a:solidFill>
+            <a:srgbClr val="F8FAFC"/>
+          </a:solidFill>
+          <a:ln w="19050">
+            <a:solidFill>
+              <a:srgbClr val="CBD5E1"/>
+            </a:solidFill>
+          </a:ln>
+        </p:spPr>
+        <p:style>
+          <a:lnRef idx="1">
+            <a:schemeClr val="accent1"/>
+          </a:lnRef>
+          <a:fillRef idx="3">
+            <a:schemeClr val="accent1"/>
+          </a:fillRef>
+          <a:effectRef idx="2">
+            <a:schemeClr val="accent1"/>
+          </a:effectRef>
+          <a:fontRef idx="minor">
+            <a:schemeClr val="lt1"/>
+          </a:fontRef>
+        </p:style>
+        <p:txBody>
+          <a:bodyPr rtlCol="0" anchor="ctr" wrap="square" lIns="182880" rIns="182880" tIns="164592" bIns="164592"/>
+          <a:lstStyle/>
+          <a:p>
+            <a:pPr algn="ctr">
+              <a:spcAft>
+                <a:spcPts val="200"/>
+              </a:spcAft>
+              <a:defRPr sz="1100" b="1">
+                <a:solidFill>
+                  <a:srgbClr val="475569"/>
+                </a:solidFill>
+                <a:latin typeface="Calibri"/>
+              </a:defRPr>
+            </a:pPr>
+            <a:r>
+              <a:t>Engineering Limitations &amp; Robust Mitigations</a:t>
+            </a:r>
+          </a:p>
+          <a:p>
+            <a:pPr>
+              <a:defRPr sz="1000">
+                <a:solidFill>
+                  <a:srgbClr val="334155"/>
+                </a:solidFill>
+                <a:latin typeface="Calibri"/>
+              </a:defRPr>
+            </a:pPr>
+            <a:r>
+              <a:t>• Semi-Structured PDFs: Requires section headers for canonical chunk tags; mitigated via rule-based chunking.</a:t>
+            </a:r>
+            <a:br/>
+            <a:r>
+              <a:t>• Streaming ASR Jitter: Acoustic speech requires confidence scoring; mitigated via rolling token thresholding.</a:t>
+            </a:r>
+            <a:br/>
+            <a:r>
+              <a:t>• Context Window Bloat: Extremely long sessions can bloat memory; mitigated via aggressive KV caching and state compaction.</a:t>
             </a:r>
           </a:p>
         </p:txBody>
@@ -15531,6 +20122,290 @@
       <p:sp>
         <p:nvSpPr>
           <p:cNvPr id="14" name="Rounded Rectangle 13"/>
+          <p:cNvSpPr/>
+          <p:nvPr/>
+        </p:nvSpPr>
+        <p:spPr>
+          <a:xfrm>
+            <a:off x="777240" y="5084064"/>
+            <a:ext cx="10607040" cy="1078992"/>
+          </a:xfrm>
+          <a:prstGeom prst="roundRect">
+            <a:avLst/>
+          </a:prstGeom>
+          <a:solidFill>
+            <a:srgbClr val="F8FAFC"/>
+          </a:solidFill>
+          <a:ln w="19050">
+            <a:solidFill>
+              <a:srgbClr val="CBD5E1"/>
+            </a:solidFill>
+          </a:ln>
+        </p:spPr>
+        <p:style>
+          <a:lnRef idx="1">
+            <a:schemeClr val="accent1"/>
+          </a:lnRef>
+          <a:fillRef idx="3">
+            <a:schemeClr val="accent1"/>
+          </a:fillRef>
+          <a:effectRef idx="2">
+            <a:schemeClr val="accent1"/>
+          </a:effectRef>
+          <a:fontRef idx="minor">
+            <a:schemeClr val="lt1"/>
+          </a:fontRef>
+        </p:style>
+        <p:txBody>
+          <a:bodyPr rtlCol="0" anchor="ctr" wrap="square" lIns="182880" rIns="182880" tIns="164592" bIns="164592"/>
+          <a:lstStyle/>
+          <a:p>
+            <a:pPr algn="ctr">
+              <a:spcAft>
+                <a:spcPts val="800"/>
+              </a:spcAft>
+              <a:defRPr sz="1400" b="1">
+                <a:solidFill>
+                  <a:srgbClr val="704EA6"/>
+                </a:solidFill>
+                <a:latin typeface="Calibri"/>
+              </a:defRPr>
+            </a:pPr>
+            <a:r>
+              <a:t>Phase 4: Multimodal Live Grounding (Q4 2027)</a:t>
+            </a:r>
+          </a:p>
+          <a:p>
+            <a:pPr>
+              <a:defRPr sz="1100">
+                <a:solidFill>
+                  <a:srgbClr val="334155"/>
+                </a:solidFill>
+                <a:latin typeface="Calibri"/>
+              </a:defRPr>
+            </a:pPr>
+            <a:r>
+              <a:t>Expand live speculative grounding to synchronized video feeds, live presentation slides, and technical schematics in real time.</a:t>
+            </a:r>
+          </a:p>
+        </p:txBody>
+      </p:sp>
+      <p:sp>
+        <p:nvSpPr>
+          <p:cNvPr id="15" name="Rounded Rectangle 14"/>
+          <p:cNvSpPr/>
+          <p:nvPr/>
+        </p:nvSpPr>
+        <p:spPr>
+          <a:xfrm>
+            <a:off x="777240" y="1463040"/>
+            <a:ext cx="10607040" cy="1078992"/>
+          </a:xfrm>
+          <a:prstGeom prst="roundRect">
+            <a:avLst/>
+          </a:prstGeom>
+          <a:solidFill>
+            <a:srgbClr val="F8FAFC"/>
+          </a:solidFill>
+          <a:ln w="19050">
+            <a:solidFill>
+              <a:srgbClr val="CBD5E1"/>
+            </a:solidFill>
+          </a:ln>
+        </p:spPr>
+        <p:style>
+          <a:lnRef idx="1">
+            <a:schemeClr val="accent1"/>
+          </a:lnRef>
+          <a:fillRef idx="3">
+            <a:schemeClr val="accent1"/>
+          </a:fillRef>
+          <a:effectRef idx="2">
+            <a:schemeClr val="accent1"/>
+          </a:effectRef>
+          <a:fontRef idx="minor">
+            <a:schemeClr val="lt1"/>
+          </a:fontRef>
+        </p:style>
+        <p:txBody>
+          <a:bodyPr rtlCol="0" anchor="ctr" wrap="square" lIns="182880" rIns="182880" tIns="164592" bIns="164592"/>
+          <a:lstStyle/>
+          <a:p>
+            <a:pPr algn="ctr">
+              <a:spcAft>
+                <a:spcPts val="800"/>
+              </a:spcAft>
+              <a:defRPr sz="1400" b="1">
+                <a:solidFill>
+                  <a:srgbClr val="704EA6"/>
+                </a:solidFill>
+                <a:latin typeface="Calibri"/>
+              </a:defRPr>
+            </a:pPr>
+            <a:r>
+              <a:t>Phase 1: End-to-End Acoustic ASR (Q1 2027)</a:t>
+            </a:r>
+          </a:p>
+          <a:p>
+            <a:pPr>
+              <a:defRPr sz="1100">
+                <a:solidFill>
+                  <a:srgbClr val="334155"/>
+                </a:solidFill>
+                <a:latin typeface="Calibri"/>
+              </a:defRPr>
+            </a:pPr>
+            <a:r>
+              <a:t>Direct integration with Whisper / Conformer streaming ASR pipelines to trigger speculative retrieval on sub-word phoneme probabilities before full word transcription.</a:t>
+            </a:r>
+          </a:p>
+        </p:txBody>
+      </p:sp>
+      <p:sp>
+        <p:nvSpPr>
+          <p:cNvPr id="16" name="Rounded Rectangle 15"/>
+          <p:cNvSpPr/>
+          <p:nvPr/>
+        </p:nvSpPr>
+        <p:spPr>
+          <a:xfrm>
+            <a:off x="777240" y="2670048"/>
+            <a:ext cx="10607040" cy="1078992"/>
+          </a:xfrm>
+          <a:prstGeom prst="roundRect">
+            <a:avLst/>
+          </a:prstGeom>
+          <a:solidFill>
+            <a:srgbClr val="F8FAFC"/>
+          </a:solidFill>
+          <a:ln w="19050">
+            <a:solidFill>
+              <a:srgbClr val="CBD5E1"/>
+            </a:solidFill>
+          </a:ln>
+        </p:spPr>
+        <p:style>
+          <a:lnRef idx="1">
+            <a:schemeClr val="accent1"/>
+          </a:lnRef>
+          <a:fillRef idx="3">
+            <a:schemeClr val="accent1"/>
+          </a:fillRef>
+          <a:effectRef idx="2">
+            <a:schemeClr val="accent1"/>
+          </a:effectRef>
+          <a:fontRef idx="minor">
+            <a:schemeClr val="lt1"/>
+          </a:fontRef>
+        </p:style>
+        <p:txBody>
+          <a:bodyPr rtlCol="0" anchor="ctr" wrap="square" lIns="182880" rIns="182880" tIns="164592" bIns="164592"/>
+          <a:lstStyle/>
+          <a:p>
+            <a:pPr algn="ctr">
+              <a:spcAft>
+                <a:spcPts val="800"/>
+              </a:spcAft>
+              <a:defRPr sz="1400" b="1">
+                <a:solidFill>
+                  <a:srgbClr val="704EA6"/>
+                </a:solidFill>
+                <a:latin typeface="Calibri"/>
+              </a:defRPr>
+            </a:pPr>
+            <a:r>
+              <a:t>Phase 2: On-Device NPU Acceleration (Q2 2027)</a:t>
+            </a:r>
+          </a:p>
+          <a:p>
+            <a:pPr>
+              <a:defRPr sz="1100">
+                <a:solidFill>
+                  <a:srgbClr val="334155"/>
+                </a:solidFill>
+                <a:latin typeface="Calibri"/>
+              </a:defRPr>
+            </a:pPr>
+            <a:r>
+              <a:t>Quantize dense embeddings and hybrid search indexes using ONNX Runtime and TensorRT-LLM for local execution on Samsung Galaxy Exynos / Snapdragon NPUs.</a:t>
+            </a:r>
+          </a:p>
+        </p:txBody>
+      </p:sp>
+      <p:sp>
+        <p:nvSpPr>
+          <p:cNvPr id="17" name="Rounded Rectangle 16"/>
+          <p:cNvSpPr/>
+          <p:nvPr/>
+        </p:nvSpPr>
+        <p:spPr>
+          <a:xfrm>
+            <a:off x="777240" y="3877056"/>
+            <a:ext cx="10607040" cy="1078992"/>
+          </a:xfrm>
+          <a:prstGeom prst="roundRect">
+            <a:avLst/>
+          </a:prstGeom>
+          <a:solidFill>
+            <a:srgbClr val="F8FAFC"/>
+          </a:solidFill>
+          <a:ln w="19050">
+            <a:solidFill>
+              <a:srgbClr val="CBD5E1"/>
+            </a:solidFill>
+          </a:ln>
+        </p:spPr>
+        <p:style>
+          <a:lnRef idx="1">
+            <a:schemeClr val="accent1"/>
+          </a:lnRef>
+          <a:fillRef idx="3">
+            <a:schemeClr val="accent1"/>
+          </a:fillRef>
+          <a:effectRef idx="2">
+            <a:schemeClr val="accent1"/>
+          </a:effectRef>
+          <a:fontRef idx="minor">
+            <a:schemeClr val="lt1"/>
+          </a:fontRef>
+        </p:style>
+        <p:txBody>
+          <a:bodyPr rtlCol="0" anchor="ctr" wrap="square" lIns="182880" rIns="182880" tIns="164592" bIns="164592"/>
+          <a:lstStyle/>
+          <a:p>
+            <a:pPr algn="ctr">
+              <a:spcAft>
+                <a:spcPts val="800"/>
+              </a:spcAft>
+              <a:defRPr sz="1400" b="1">
+                <a:solidFill>
+                  <a:srgbClr val="704EA6"/>
+                </a:solidFill>
+                <a:latin typeface="Calibri"/>
+              </a:defRPr>
+            </a:pPr>
+            <a:r>
+              <a:t>Phase 3: Knowledge Graph Augmentation (Q3 2027)</a:t>
+            </a:r>
+          </a:p>
+          <a:p>
+            <a:pPr>
+              <a:defRPr sz="1100">
+                <a:solidFill>
+                  <a:srgbClr val="334155"/>
+                </a:solidFill>
+                <a:latin typeface="Calibri"/>
+              </a:defRPr>
+            </a:pPr>
+            <a:r>
+              <a:t>Connect hybrid vector search with Neo4j enterprise knowledge graphs to enable multi-hop relational reasoning across complex corporate reporting hierarchies.</a:t>
+            </a:r>
+          </a:p>
+        </p:txBody>
+      </p:sp>
+      <p:sp>
+        <p:nvSpPr>
+          <p:cNvPr id="18" name="Rounded Rectangle 17"/>
           <p:cNvSpPr/>
           <p:nvPr/>
         </p:nvSpPr>
